--- a/exports/pptx/lessons/senior-module-03-ayurveda-good-health/day-04-modern-evidence.pptx
+++ b/exports/pptx/lessons/senior-module-03-ayurveda-good-health/day-04-modern-evidence.pptx
@@ -3110,8 +3110,8 @@
         </p:nvSpPr>
         <p:spPr>
           <a:xfrm>
-            <a:off x="634901" y="4053632"/>
-            <a:ext cx="8102798" cy="281880"/>
+            <a:off x="406301" y="1254323"/>
+            <a:ext cx="8498026" cy="213271"/>
           </a:xfrm>
           <a:prstGeom prst="rect">
             <a:avLst/>
@@ -3123,46 +3123,28 @@
           <a:bodyPr wrap="square" lIns="0" tIns="0" rIns="0" bIns="0" rtlCol="0" anchor="t"/>
           <a:lstStyle/>
           <a:p>
-            <a:pPr algn="l" marL="342900" indent="-342900">
-              <a:lnSpc>
-                <a:spcPts val="1620"/>
-              </a:lnSpc>
-              <a:spcAft>
-                <a:spcPts val="300"/>
-              </a:spcAft>
-              <a:buSzPct val="100000"/>
-              <a:buChar char="•"/>
-            </a:pPr>
-            <a:r>
-              <a:rPr lang="en-US" sz="1200" b="1" dirty="0">
-                <a:solidFill>
-                  <a:srgbClr val="1A1A1A"/>
-                </a:solidFill>
-                <a:latin typeface="Georgia" pitchFamily="34" charset="0"/>
-                <a:ea typeface="Georgia" pitchFamily="34" charset="-122"/>
-                <a:cs typeface="Georgia" pitchFamily="34" charset="-120"/>
-              </a:rPr>
-              <a:t>The pattern.</a:t>
-            </a:r>
-            <a:pPr algn="l" indent="0" marL="0">
-              <a:lnSpc>
-                <a:spcPts val="1620"/>
-              </a:lnSpc>
-              <a:spcAft>
-                <a:spcPts val="300"/>
-              </a:spcAft>
-              <a:buNone/>
-            </a:pPr>
-            <a:r>
-              <a:rPr lang="en-US" sz="1200" dirty="0">
-                <a:solidFill>
-                  <a:srgbClr val="1A1A1A"/>
-                </a:solidFill>
-                <a:latin typeface="Georgia" pitchFamily="34" charset="0"/>
-                <a:ea typeface="Georgia" pitchFamily="34" charset="-122"/>
-                <a:cs typeface="Georgia" pitchFamily="34" charset="-120"/>
-              </a:rPr>
-              <a:t> Things that survive evidence scrutiny:</a:t>
+            <a:pPr algn="l" indent="0" marL="0">
+              <a:lnSpc>
+                <a:spcPts val="1680"/>
+              </a:lnSpc>
+              <a:spcBef>
+                <a:spcPts val="300"/>
+              </a:spcBef>
+              <a:spcAft>
+                <a:spcPts val="300"/>
+              </a:spcAft>
+              <a:buNone/>
+            </a:pPr>
+            <a:r>
+              <a:rPr lang="en-US" sz="1200" i="1" dirty="0">
+                <a:solidFill>
+                  <a:srgbClr val="1A1A1A"/>
+                </a:solidFill>
+                <a:latin typeface="Georgia" pitchFamily="34" charset="0"/>
+                <a:ea typeface="Georgia" pitchFamily="34" charset="-122"/>
+                <a:cs typeface="Georgia" pitchFamily="34" charset="-120"/>
+              </a:rPr>
+              <a:t>Each row: Intervention · Modern evidence · Quality.</a:t>
             </a:r>
             <a:endParaRPr lang="en-US" sz="1200" dirty="0"/>
           </a:p>
@@ -3176,8 +3158,8 @@
         </p:nvSpPr>
         <p:spPr>
           <a:xfrm>
-            <a:off x="406301" y="4424363"/>
-            <a:ext cx="8498026" cy="639812"/>
+            <a:off x="634901" y="1556445"/>
+            <a:ext cx="8102798" cy="2194024"/>
           </a:xfrm>
           <a:prstGeom prst="rect">
             <a:avLst/>
@@ -3189,13 +3171,31 @@
           <a:bodyPr wrap="square" lIns="0" tIns="0" rIns="0" bIns="0" rtlCol="0" anchor="t"/>
           <a:lstStyle/>
           <a:p>
-            <a:pPr algn="l" indent="0" marL="0">
-              <a:lnSpc>
-                <a:spcPts val="1680"/>
-              </a:lnSpc>
-              <a:spcBef>
-                <a:spcPts val="300"/>
-              </a:spcBef>
+            <a:pPr algn="l" marL="342900" indent="-342900">
+              <a:lnSpc>
+                <a:spcPts val="1620"/>
+              </a:lnSpc>
+              <a:spcAft>
+                <a:spcPts val="300"/>
+              </a:spcAft>
+              <a:buSzPct val="100000"/>
+              <a:buChar char="•"/>
+            </a:pPr>
+            <a:r>
+              <a:rPr lang="en-US" sz="1200" b="1" dirty="0">
+                <a:solidFill>
+                  <a:srgbClr val="1A1A1A"/>
+                </a:solidFill>
+                <a:latin typeface="Georgia" pitchFamily="34" charset="0"/>
+                <a:ea typeface="Georgia" pitchFamily="34" charset="-122"/>
+                <a:cs typeface="Georgia" pitchFamily="34" charset="-120"/>
+              </a:rPr>
+              <a:t>Turmeric (curcumin) — anti-inflammatory</a:t>
+            </a:r>
+            <a:pPr algn="l" indent="0" marL="0">
+              <a:lnSpc>
+                <a:spcPts val="1620"/>
+              </a:lnSpc>
               <a:spcAft>
                 <a:spcPts val="300"/>
               </a:spcAft>
@@ -3210,7 +3210,355 @@
                 <a:ea typeface="Georgia" pitchFamily="34" charset="-122"/>
                 <a:cs typeface="Georgia" pitchFamily="34" charset="-120"/>
               </a:rPr>
-              <a:t>– Single-compound herbs with measurable biochemical effects (turmeric, ashwagandha, tulsi).    – Lifestyle / behavioral interventions aligned with modern lifestyle medicine (regular sleep, meal timing, exercise).    – General yoga and breath interventions.</a:t>
+              <a:t> — Well-replicated; reviews in </a:t>
+            </a:r>
+            <a:pPr algn="l" indent="0" marL="0">
+              <a:lnSpc>
+                <a:spcPts val="1620"/>
+              </a:lnSpc>
+              <a:spcAft>
+                <a:spcPts val="300"/>
+              </a:spcAft>
+              <a:buNone/>
+            </a:pPr>
+            <a:r>
+              <a:rPr lang="en-US" sz="1200" i="1" dirty="0">
+                <a:solidFill>
+                  <a:srgbClr val="1A1A1A"/>
+                </a:solidFill>
+                <a:latin typeface="Georgia" pitchFamily="34" charset="0"/>
+                <a:ea typeface="Georgia" pitchFamily="34" charset="-122"/>
+                <a:cs typeface="Georgia" pitchFamily="34" charset="-120"/>
+              </a:rPr>
+              <a:t>Int J Biochem Cell Biol</a:t>
+            </a:r>
+            <a:pPr algn="l" indent="0" marL="0">
+              <a:lnSpc>
+                <a:spcPts val="1620"/>
+              </a:lnSpc>
+              <a:spcAft>
+                <a:spcPts val="300"/>
+              </a:spcAft>
+              <a:buNone/>
+            </a:pPr>
+            <a:r>
+              <a:rPr lang="en-US" sz="1200" dirty="0">
+                <a:solidFill>
+                  <a:srgbClr val="1A1A1A"/>
+                </a:solidFill>
+                <a:latin typeface="Georgia" pitchFamily="34" charset="0"/>
+                <a:ea typeface="Georgia" pitchFamily="34" charset="-122"/>
+                <a:cs typeface="Georgia" pitchFamily="34" charset="-120"/>
+              </a:rPr>
+              <a:t> · Strong</a:t>
+            </a:r>
+            <a:endParaRPr lang="en-US" sz="1200" dirty="0"/>
+          </a:p>
+          <a:p>
+            <a:pPr algn="l" marL="342900" indent="-342900">
+              <a:lnSpc>
+                <a:spcPts val="1620"/>
+              </a:lnSpc>
+              <a:spcAft>
+                <a:spcPts val="300"/>
+              </a:spcAft>
+              <a:buSzPct val="100000"/>
+              <a:buChar char="•"/>
+            </a:pPr>
+            <a:r>
+              <a:rPr lang="en-US" sz="1200" b="1" dirty="0">
+                <a:solidFill>
+                  <a:srgbClr val="1A1A1A"/>
+                </a:solidFill>
+                <a:latin typeface="Georgia" pitchFamily="34" charset="0"/>
+                <a:ea typeface="Georgia" pitchFamily="34" charset="-122"/>
+                <a:cs typeface="Georgia" pitchFamily="34" charset="-120"/>
+              </a:rPr>
+              <a:t>Time-restricted eating</a:t>
+            </a:r>
+            <a:pPr algn="l" indent="0" marL="0">
+              <a:lnSpc>
+                <a:spcPts val="1620"/>
+              </a:lnSpc>
+              <a:spcAft>
+                <a:spcPts val="300"/>
+              </a:spcAft>
+              <a:buNone/>
+            </a:pPr>
+            <a:r>
+              <a:rPr lang="en-US" sz="1200" dirty="0">
+                <a:solidFill>
+                  <a:srgbClr val="1A1A1A"/>
+                </a:solidFill>
+                <a:latin typeface="Georgia" pitchFamily="34" charset="0"/>
+                <a:ea typeface="Georgia" pitchFamily="34" charset="-122"/>
+                <a:cs typeface="Georgia" pitchFamily="34" charset="-120"/>
+              </a:rPr>
+              <a:t> (aligned with dinacharya midday-meal principle) — Panda et al. — strong evidence for metabolic benefits · Strong</a:t>
+            </a:r>
+            <a:endParaRPr lang="en-US" sz="1200" dirty="0"/>
+          </a:p>
+          <a:p>
+            <a:pPr algn="l" marL="342900" indent="-342900">
+              <a:lnSpc>
+                <a:spcPts val="1620"/>
+              </a:lnSpc>
+              <a:spcAft>
+                <a:spcPts val="300"/>
+              </a:spcAft>
+              <a:buSzPct val="100000"/>
+              <a:buChar char="•"/>
+            </a:pPr>
+            <a:r>
+              <a:rPr lang="en-US" sz="1200" b="1" dirty="0">
+                <a:solidFill>
+                  <a:srgbClr val="1A1A1A"/>
+                </a:solidFill>
+                <a:latin typeface="Georgia" pitchFamily="34" charset="0"/>
+                <a:ea typeface="Georgia" pitchFamily="34" charset="-122"/>
+                <a:cs typeface="Georgia" pitchFamily="34" charset="-120"/>
+              </a:rPr>
+              <a:t>Yoga + breath for HRV</a:t>
+            </a:r>
+            <a:pPr algn="l" indent="0" marL="0">
+              <a:lnSpc>
+                <a:spcPts val="1620"/>
+              </a:lnSpc>
+              <a:spcAft>
+                <a:spcPts val="300"/>
+              </a:spcAft>
+              <a:buNone/>
+            </a:pPr>
+            <a:r>
+              <a:rPr lang="en-US" sz="1200" dirty="0">
+                <a:solidFill>
+                  <a:srgbClr val="1A1A1A"/>
+                </a:solidFill>
+                <a:latin typeface="Georgia" pitchFamily="34" charset="0"/>
+                <a:ea typeface="Georgia" pitchFamily="34" charset="-122"/>
+                <a:cs typeface="Georgia" pitchFamily="34" charset="-120"/>
+              </a:rPr>
+              <a:t> — Streeter (2010), multiple studies · Moderate</a:t>
+            </a:r>
+            <a:endParaRPr lang="en-US" sz="1200" dirty="0"/>
+          </a:p>
+          <a:p>
+            <a:pPr algn="l" marL="342900" indent="-342900">
+              <a:lnSpc>
+                <a:spcPts val="1620"/>
+              </a:lnSpc>
+              <a:spcAft>
+                <a:spcPts val="300"/>
+              </a:spcAft>
+              <a:buSzPct val="100000"/>
+              <a:buChar char="•"/>
+            </a:pPr>
+            <a:r>
+              <a:rPr lang="en-US" sz="1200" b="1" dirty="0">
+                <a:solidFill>
+                  <a:srgbClr val="1A1A1A"/>
+                </a:solidFill>
+                <a:latin typeface="Georgia" pitchFamily="34" charset="0"/>
+                <a:ea typeface="Georgia" pitchFamily="34" charset="-122"/>
+                <a:cs typeface="Georgia" pitchFamily="34" charset="-120"/>
+              </a:rPr>
+              <a:t>Tulsi (Ocimum sanctum) adaptogenic</a:t>
+            </a:r>
+            <a:pPr algn="l" indent="0" marL="0">
+              <a:lnSpc>
+                <a:spcPts val="1620"/>
+              </a:lnSpc>
+              <a:spcAft>
+                <a:spcPts val="300"/>
+              </a:spcAft>
+              <a:buNone/>
+            </a:pPr>
+            <a:r>
+              <a:rPr lang="en-US" sz="1200" dirty="0">
+                <a:solidFill>
+                  <a:srgbClr val="1A1A1A"/>
+                </a:solidFill>
+                <a:latin typeface="Georgia" pitchFamily="34" charset="0"/>
+                <a:ea typeface="Georgia" pitchFamily="34" charset="-122"/>
+                <a:cs typeface="Georgia" pitchFamily="34" charset="-120"/>
+              </a:rPr>
+              <a:t> — Modest RCT support for stress reduction · Modest</a:t>
+            </a:r>
+            <a:endParaRPr lang="en-US" sz="1200" dirty="0"/>
+          </a:p>
+          <a:p>
+            <a:pPr algn="l" marL="342900" indent="-342900">
+              <a:lnSpc>
+                <a:spcPts val="1620"/>
+              </a:lnSpc>
+              <a:spcAft>
+                <a:spcPts val="300"/>
+              </a:spcAft>
+              <a:buSzPct val="100000"/>
+              <a:buChar char="•"/>
+            </a:pPr>
+            <a:r>
+              <a:rPr lang="en-US" sz="1200" b="1" dirty="0">
+                <a:solidFill>
+                  <a:srgbClr val="1A1A1A"/>
+                </a:solidFill>
+                <a:latin typeface="Georgia" pitchFamily="34" charset="0"/>
+                <a:ea typeface="Georgia" pitchFamily="34" charset="-122"/>
+                <a:cs typeface="Georgia" pitchFamily="34" charset="-120"/>
+              </a:rPr>
+              <a:t>Triphala for digestive function</a:t>
+            </a:r>
+            <a:pPr algn="l" indent="0" marL="0">
+              <a:lnSpc>
+                <a:spcPts val="1620"/>
+              </a:lnSpc>
+              <a:spcAft>
+                <a:spcPts val="300"/>
+              </a:spcAft>
+              <a:buNone/>
+            </a:pPr>
+            <a:r>
+              <a:rPr lang="en-US" sz="1200" dirty="0">
+                <a:solidFill>
+                  <a:srgbClr val="1A1A1A"/>
+                </a:solidFill>
+                <a:latin typeface="Georgia" pitchFamily="34" charset="0"/>
+                <a:ea typeface="Georgia" pitchFamily="34" charset="-122"/>
+                <a:cs typeface="Georgia" pitchFamily="34" charset="-120"/>
+              </a:rPr>
+              <a:t> — Some clinical evidence · Modest</a:t>
+            </a:r>
+            <a:endParaRPr lang="en-US" sz="1200" dirty="0"/>
+          </a:p>
+          <a:p>
+            <a:pPr algn="l" marL="342900" indent="-342900">
+              <a:lnSpc>
+                <a:spcPts val="1620"/>
+              </a:lnSpc>
+              <a:spcAft>
+                <a:spcPts val="300"/>
+              </a:spcAft>
+              <a:buSzPct val="100000"/>
+              <a:buChar char="•"/>
+            </a:pPr>
+            <a:r>
+              <a:rPr lang="en-US" sz="1200" b="1" dirty="0">
+                <a:solidFill>
+                  <a:srgbClr val="1A1A1A"/>
+                </a:solidFill>
+                <a:latin typeface="Georgia" pitchFamily="34" charset="0"/>
+                <a:ea typeface="Georgia" pitchFamily="34" charset="-122"/>
+                <a:cs typeface="Georgia" pitchFamily="34" charset="-120"/>
+              </a:rPr>
+              <a:t>Pulse diagnosis (nāḍī parīkṣā)</a:t>
+            </a:r>
+            <a:pPr algn="l" indent="0" marL="0">
+              <a:lnSpc>
+                <a:spcPts val="1620"/>
+              </a:lnSpc>
+              <a:spcAft>
+                <a:spcPts val="300"/>
+              </a:spcAft>
+              <a:buNone/>
+            </a:pPr>
+            <a:r>
+              <a:rPr lang="en-US" sz="1200" dirty="0">
+                <a:solidFill>
+                  <a:srgbClr val="1A1A1A"/>
+                </a:solidFill>
+                <a:latin typeface="Georgia" pitchFamily="34" charset="0"/>
+                <a:ea typeface="Georgia" pitchFamily="34" charset="-122"/>
+                <a:cs typeface="Georgia" pitchFamily="34" charset="-120"/>
+              </a:rPr>
+              <a:t> — Inter-rater agreement studies — mixed · Weak</a:t>
+            </a:r>
+            <a:endParaRPr lang="en-US" sz="1200" dirty="0"/>
+          </a:p>
+          <a:p>
+            <a:pPr algn="l" marL="342900" indent="-342900">
+              <a:lnSpc>
+                <a:spcPts val="1620"/>
+              </a:lnSpc>
+              <a:spcAft>
+                <a:spcPts val="300"/>
+              </a:spcAft>
+              <a:buSzPct val="100000"/>
+              <a:buChar char="•"/>
+            </a:pPr>
+            <a:r>
+              <a:rPr lang="en-US" sz="1200" b="1" dirty="0">
+                <a:solidFill>
+                  <a:srgbClr val="1A1A1A"/>
+                </a:solidFill>
+                <a:latin typeface="Georgia" pitchFamily="34" charset="0"/>
+                <a:ea typeface="Georgia" pitchFamily="34" charset="-122"/>
+                <a:cs typeface="Georgia" pitchFamily="34" charset="-120"/>
+              </a:rPr>
+              <a:t>Specific dosha-based dietary prescriptions</a:t>
+            </a:r>
+            <a:pPr algn="l" indent="0" marL="0">
+              <a:lnSpc>
+                <a:spcPts val="1620"/>
+              </a:lnSpc>
+              <a:spcAft>
+                <a:spcPts val="300"/>
+              </a:spcAft>
+              <a:buNone/>
+            </a:pPr>
+            <a:r>
+              <a:rPr lang="en-US" sz="1200" dirty="0">
+                <a:solidFill>
+                  <a:srgbClr val="1A1A1A"/>
+                </a:solidFill>
+                <a:latin typeface="Georgia" pitchFamily="34" charset="0"/>
+                <a:ea typeface="Georgia" pitchFamily="34" charset="-122"/>
+                <a:cs typeface="Georgia" pitchFamily="34" charset="-120"/>
+              </a:rPr>
+              <a:t> — Mixed; many specific claims fail RCT · Weak</a:t>
+            </a:r>
+            <a:endParaRPr lang="en-US" sz="1200" dirty="0"/>
+          </a:p>
+          <a:p>
+            <a:pPr algn="l" marL="342900" indent="-342900">
+              <a:lnSpc>
+                <a:spcPts val="1620"/>
+              </a:lnSpc>
+              <a:spcAft>
+                <a:spcPts val="300"/>
+              </a:spcAft>
+              <a:buSzPct val="100000"/>
+              <a:buChar char="•"/>
+            </a:pPr>
+            <a:r>
+              <a:rPr lang="en-US" sz="1200" b="1" dirty="0">
+                <a:solidFill>
+                  <a:srgbClr val="1A1A1A"/>
+                </a:solidFill>
+                <a:latin typeface="Georgia" pitchFamily="34" charset="0"/>
+                <a:ea typeface="Georgia" pitchFamily="34" charset="-122"/>
+                <a:cs typeface="Georgia" pitchFamily="34" charset="-120"/>
+              </a:rPr>
+              <a:t>Pancha-karma cleansing protocols</a:t>
+            </a:r>
+            <a:pPr algn="l" indent="0" marL="0">
+              <a:lnSpc>
+                <a:spcPts val="1620"/>
+              </a:lnSpc>
+              <a:spcAft>
+                <a:spcPts val="300"/>
+              </a:spcAft>
+              <a:buNone/>
+            </a:pPr>
+            <a:r>
+              <a:rPr lang="en-US" sz="1200" dirty="0">
+                <a:solidFill>
+                  <a:srgbClr val="1A1A1A"/>
+                </a:solidFill>
+                <a:latin typeface="Georgia" pitchFamily="34" charset="0"/>
+                <a:ea typeface="Georgia" pitchFamily="34" charset="-122"/>
+                <a:cs typeface="Georgia" pitchFamily="34" charset="-120"/>
+              </a:rPr>
+              <a:t> — Limited; mostly observational · Weak</a:t>
             </a:r>
             <a:endParaRPr lang="en-US" sz="1200" dirty="0"/>
           </a:p>
@@ -3224,8 +3572,8 @@
         </p:nvSpPr>
         <p:spPr>
           <a:xfrm>
-            <a:off x="406301" y="5140375"/>
-            <a:ext cx="8498026" cy="426541"/>
+            <a:off x="634901" y="3851970"/>
+            <a:ext cx="8102798" cy="281880"/>
           </a:xfrm>
           <a:prstGeom prst="rect">
             <a:avLst/>
@@ -3237,13 +3585,31 @@
           <a:bodyPr wrap="square" lIns="0" tIns="0" rIns="0" bIns="0" rtlCol="0" anchor="t"/>
           <a:lstStyle/>
           <a:p>
-            <a:pPr algn="l" indent="0" marL="0">
-              <a:lnSpc>
-                <a:spcPts val="1680"/>
-              </a:lnSpc>
-              <a:spcBef>
-                <a:spcPts val="300"/>
-              </a:spcBef>
+            <a:pPr algn="l" marL="342900" indent="-342900">
+              <a:lnSpc>
+                <a:spcPts val="1620"/>
+              </a:lnSpc>
+              <a:spcAft>
+                <a:spcPts val="300"/>
+              </a:spcAft>
+              <a:buSzPct val="100000"/>
+              <a:buChar char="•"/>
+            </a:pPr>
+            <a:r>
+              <a:rPr lang="en-US" sz="1200" b="1" dirty="0">
+                <a:solidFill>
+                  <a:srgbClr val="1A1A1A"/>
+                </a:solidFill>
+                <a:latin typeface="Georgia" pitchFamily="34" charset="0"/>
+                <a:ea typeface="Georgia" pitchFamily="34" charset="-122"/>
+                <a:cs typeface="Georgia" pitchFamily="34" charset="-120"/>
+              </a:rPr>
+              <a:t>The pattern.</a:t>
+            </a:r>
+            <a:pPr algn="l" indent="0" marL="0">
+              <a:lnSpc>
+                <a:spcPts val="1620"/>
+              </a:lnSpc>
               <a:spcAft>
                 <a:spcPts val="300"/>
               </a:spcAft>
@@ -3258,7 +3624,7 @@
                 <a:ea typeface="Georgia" pitchFamily="34" charset="-122"/>
                 <a:cs typeface="Georgia" pitchFamily="34" charset="-120"/>
               </a:rPr>
-              <a:t>Things that don't survive as well:    – Specific dosha-type prescriptions for unrelated conditions.    – Mechanism claims that contradict modern physiology.</a:t>
+              <a:t> Things that survive evidence scrutiny:</a:t>
             </a:r>
             <a:endParaRPr lang="en-US" sz="1200" dirty="0"/>
           </a:p>
@@ -3272,8 +3638,8 @@
         </p:nvSpPr>
         <p:spPr>
           <a:xfrm>
-            <a:off x="634901" y="5655766"/>
-            <a:ext cx="8102798" cy="487561"/>
+            <a:off x="406301" y="4222700"/>
+            <a:ext cx="8498026" cy="639812"/>
           </a:xfrm>
           <a:prstGeom prst="rect">
             <a:avLst/>
@@ -3285,31 +3651,13 @@
           <a:bodyPr wrap="square" lIns="0" tIns="0" rIns="0" bIns="0" rtlCol="0" anchor="t"/>
           <a:lstStyle/>
           <a:p>
-            <a:pPr algn="l" marL="342900" indent="-342900">
-              <a:lnSpc>
-                <a:spcPts val="1620"/>
-              </a:lnSpc>
-              <a:spcAft>
-                <a:spcPts val="300"/>
-              </a:spcAft>
-              <a:buSzPct val="100000"/>
-              <a:buChar char="•"/>
-            </a:pPr>
-            <a:r>
-              <a:rPr lang="en-US" sz="1200" b="1" dirty="0">
-                <a:solidFill>
-                  <a:srgbClr val="1A1A1A"/>
-                </a:solidFill>
-                <a:latin typeface="Georgia" pitchFamily="34" charset="0"/>
-                <a:ea typeface="Georgia" pitchFamily="34" charset="-122"/>
-                <a:cs typeface="Georgia" pitchFamily="34" charset="-120"/>
-              </a:rPr>
-              <a:t>The honest framing:</a:t>
-            </a:r>
-            <a:pPr algn="l" indent="0" marL="0">
-              <a:lnSpc>
-                <a:spcPts val="1620"/>
-              </a:lnSpc>
+            <a:pPr algn="l" indent="0" marL="0">
+              <a:lnSpc>
+                <a:spcPts val="1680"/>
+              </a:lnSpc>
+              <a:spcBef>
+                <a:spcPts val="300"/>
+              </a:spcBef>
               <a:spcAft>
                 <a:spcPts val="300"/>
               </a:spcAft>
@@ -3324,87 +3672,7 @@
                 <a:ea typeface="Georgia" pitchFamily="34" charset="-122"/>
                 <a:cs typeface="Georgia" pitchFamily="34" charset="-120"/>
               </a:rPr>
-              <a:t> "Ayurveda has </a:t>
-            </a:r>
-            <a:pPr algn="l" indent="0" marL="0">
-              <a:lnSpc>
-                <a:spcPts val="1620"/>
-              </a:lnSpc>
-              <a:spcAft>
-                <a:spcPts val="300"/>
-              </a:spcAft>
-              <a:buNone/>
-            </a:pPr>
-            <a:r>
-              <a:rPr lang="en-US" sz="1200" i="1" dirty="0">
-                <a:solidFill>
-                  <a:srgbClr val="1A1A1A"/>
-                </a:solidFill>
-                <a:latin typeface="Georgia" pitchFamily="34" charset="0"/>
-                <a:ea typeface="Georgia" pitchFamily="34" charset="-122"/>
-                <a:cs typeface="Georgia" pitchFamily="34" charset="-120"/>
-              </a:rPr>
-              <a:t>some</a:t>
-            </a:r>
-            <a:pPr algn="l" indent="0" marL="0">
-              <a:lnSpc>
-                <a:spcPts val="1620"/>
-              </a:lnSpc>
-              <a:spcAft>
-                <a:spcPts val="300"/>
-              </a:spcAft>
-              <a:buNone/>
-            </a:pPr>
-            <a:r>
-              <a:rPr lang="en-US" sz="1200" dirty="0">
-                <a:solidFill>
-                  <a:srgbClr val="1A1A1A"/>
-                </a:solidFill>
-                <a:latin typeface="Georgia" pitchFamily="34" charset="0"/>
-                <a:ea typeface="Georgia" pitchFamily="34" charset="-122"/>
-                <a:cs typeface="Georgia" pitchFamily="34" charset="-120"/>
-              </a:rPr>
-              <a:t> strong evidence and </a:t>
-            </a:r>
-            <a:pPr algn="l" indent="0" marL="0">
-              <a:lnSpc>
-                <a:spcPts val="1620"/>
-              </a:lnSpc>
-              <a:spcAft>
-                <a:spcPts val="300"/>
-              </a:spcAft>
-              <a:buNone/>
-            </a:pPr>
-            <a:r>
-              <a:rPr lang="en-US" sz="1200" i="1" dirty="0">
-                <a:solidFill>
-                  <a:srgbClr val="1A1A1A"/>
-                </a:solidFill>
-                <a:latin typeface="Georgia" pitchFamily="34" charset="0"/>
-                <a:ea typeface="Georgia" pitchFamily="34" charset="-122"/>
-                <a:cs typeface="Georgia" pitchFamily="34" charset="-120"/>
-              </a:rPr>
-              <a:t>some</a:t>
-            </a:r>
-            <a:pPr algn="l" indent="0" marL="0">
-              <a:lnSpc>
-                <a:spcPts val="1620"/>
-              </a:lnSpc>
-              <a:spcAft>
-                <a:spcPts val="300"/>
-              </a:spcAft>
-              <a:buNone/>
-            </a:pPr>
-            <a:r>
-              <a:rPr lang="en-US" sz="1200" dirty="0">
-                <a:solidFill>
-                  <a:srgbClr val="1A1A1A"/>
-                </a:solidFill>
-                <a:latin typeface="Georgia" pitchFamily="34" charset="0"/>
-                <a:ea typeface="Georgia" pitchFamily="34" charset="-122"/>
-                <a:cs typeface="Georgia" pitchFamily="34" charset="-120"/>
-              </a:rPr>
-              <a:t> weak evidence. The mature stance is to use the strong, study the moderate, and be skeptical of the weak."</a:t>
+              <a:t>– Single-compound herbs with measurable biochemical effects (turmeric, ashwagandha, tulsi).    – Lifestyle / behavioral interventions aligned with modern lifestyle medicine (regular sleep, meal timing, exercise).    – General yoga and breath interventions.</a:t>
             </a:r>
             <a:endParaRPr lang="en-US" sz="1200" dirty="0"/>
           </a:p>
@@ -3418,7 +3686,201 @@
         </p:nvSpPr>
         <p:spPr>
           <a:xfrm>
-            <a:off x="406301" y="6308378"/>
+            <a:off x="406301" y="4938713"/>
+            <a:ext cx="8498026" cy="426541"/>
+          </a:xfrm>
+          <a:prstGeom prst="rect">
+            <a:avLst/>
+          </a:prstGeom>
+          <a:noFill/>
+          <a:ln/>
+        </p:spPr>
+        <p:txBody>
+          <a:bodyPr wrap="square" lIns="0" tIns="0" rIns="0" bIns="0" rtlCol="0" anchor="t"/>
+          <a:lstStyle/>
+          <a:p>
+            <a:pPr algn="l" indent="0" marL="0">
+              <a:lnSpc>
+                <a:spcPts val="1680"/>
+              </a:lnSpc>
+              <a:spcBef>
+                <a:spcPts val="300"/>
+              </a:spcBef>
+              <a:spcAft>
+                <a:spcPts val="300"/>
+              </a:spcAft>
+              <a:buNone/>
+            </a:pPr>
+            <a:r>
+              <a:rPr lang="en-US" sz="1200" dirty="0">
+                <a:solidFill>
+                  <a:srgbClr val="1A1A1A"/>
+                </a:solidFill>
+                <a:latin typeface="Georgia" pitchFamily="34" charset="0"/>
+                <a:ea typeface="Georgia" pitchFamily="34" charset="-122"/>
+                <a:cs typeface="Georgia" pitchFamily="34" charset="-120"/>
+              </a:rPr>
+              <a:t>Things that don't survive as well:    – Specific dosha-type prescriptions for unrelated conditions.    – Mechanism claims that contradict modern physiology.</a:t>
+            </a:r>
+            <a:endParaRPr lang="en-US" sz="1200" dirty="0"/>
+          </a:p>
+        </p:txBody>
+      </p:sp>
+      <p:sp>
+        <p:nvSpPr>
+          <p:cNvPr id="10" name="Text 8"/>
+          <p:cNvSpPr/>
+          <p:nvPr/>
+        </p:nvSpPr>
+        <p:spPr>
+          <a:xfrm>
+            <a:off x="634901" y="5454104"/>
+            <a:ext cx="8102798" cy="487561"/>
+          </a:xfrm>
+          <a:prstGeom prst="rect">
+            <a:avLst/>
+          </a:prstGeom>
+          <a:noFill/>
+          <a:ln/>
+        </p:spPr>
+        <p:txBody>
+          <a:bodyPr wrap="square" lIns="0" tIns="0" rIns="0" bIns="0" rtlCol="0" anchor="t"/>
+          <a:lstStyle/>
+          <a:p>
+            <a:pPr algn="l" marL="342900" indent="-342900">
+              <a:lnSpc>
+                <a:spcPts val="1620"/>
+              </a:lnSpc>
+              <a:spcAft>
+                <a:spcPts val="300"/>
+              </a:spcAft>
+              <a:buSzPct val="100000"/>
+              <a:buChar char="•"/>
+            </a:pPr>
+            <a:r>
+              <a:rPr lang="en-US" sz="1200" b="1" dirty="0">
+                <a:solidFill>
+                  <a:srgbClr val="1A1A1A"/>
+                </a:solidFill>
+                <a:latin typeface="Georgia" pitchFamily="34" charset="0"/>
+                <a:ea typeface="Georgia" pitchFamily="34" charset="-122"/>
+                <a:cs typeface="Georgia" pitchFamily="34" charset="-120"/>
+              </a:rPr>
+              <a:t>The honest framing:</a:t>
+            </a:r>
+            <a:pPr algn="l" indent="0" marL="0">
+              <a:lnSpc>
+                <a:spcPts val="1620"/>
+              </a:lnSpc>
+              <a:spcAft>
+                <a:spcPts val="300"/>
+              </a:spcAft>
+              <a:buNone/>
+            </a:pPr>
+            <a:r>
+              <a:rPr lang="en-US" sz="1200" dirty="0">
+                <a:solidFill>
+                  <a:srgbClr val="1A1A1A"/>
+                </a:solidFill>
+                <a:latin typeface="Georgia" pitchFamily="34" charset="0"/>
+                <a:ea typeface="Georgia" pitchFamily="34" charset="-122"/>
+                <a:cs typeface="Georgia" pitchFamily="34" charset="-120"/>
+              </a:rPr>
+              <a:t> "Ayurveda has </a:t>
+            </a:r>
+            <a:pPr algn="l" indent="0" marL="0">
+              <a:lnSpc>
+                <a:spcPts val="1620"/>
+              </a:lnSpc>
+              <a:spcAft>
+                <a:spcPts val="300"/>
+              </a:spcAft>
+              <a:buNone/>
+            </a:pPr>
+            <a:r>
+              <a:rPr lang="en-US" sz="1200" i="1" dirty="0">
+                <a:solidFill>
+                  <a:srgbClr val="1A1A1A"/>
+                </a:solidFill>
+                <a:latin typeface="Georgia" pitchFamily="34" charset="0"/>
+                <a:ea typeface="Georgia" pitchFamily="34" charset="-122"/>
+                <a:cs typeface="Georgia" pitchFamily="34" charset="-120"/>
+              </a:rPr>
+              <a:t>some</a:t>
+            </a:r>
+            <a:pPr algn="l" indent="0" marL="0">
+              <a:lnSpc>
+                <a:spcPts val="1620"/>
+              </a:lnSpc>
+              <a:spcAft>
+                <a:spcPts val="300"/>
+              </a:spcAft>
+              <a:buNone/>
+            </a:pPr>
+            <a:r>
+              <a:rPr lang="en-US" sz="1200" dirty="0">
+                <a:solidFill>
+                  <a:srgbClr val="1A1A1A"/>
+                </a:solidFill>
+                <a:latin typeface="Georgia" pitchFamily="34" charset="0"/>
+                <a:ea typeface="Georgia" pitchFamily="34" charset="-122"/>
+                <a:cs typeface="Georgia" pitchFamily="34" charset="-120"/>
+              </a:rPr>
+              <a:t> strong evidence and </a:t>
+            </a:r>
+            <a:pPr algn="l" indent="0" marL="0">
+              <a:lnSpc>
+                <a:spcPts val="1620"/>
+              </a:lnSpc>
+              <a:spcAft>
+                <a:spcPts val="300"/>
+              </a:spcAft>
+              <a:buNone/>
+            </a:pPr>
+            <a:r>
+              <a:rPr lang="en-US" sz="1200" i="1" dirty="0">
+                <a:solidFill>
+                  <a:srgbClr val="1A1A1A"/>
+                </a:solidFill>
+                <a:latin typeface="Georgia" pitchFamily="34" charset="0"/>
+                <a:ea typeface="Georgia" pitchFamily="34" charset="-122"/>
+                <a:cs typeface="Georgia" pitchFamily="34" charset="-120"/>
+              </a:rPr>
+              <a:t>some</a:t>
+            </a:r>
+            <a:pPr algn="l" indent="0" marL="0">
+              <a:lnSpc>
+                <a:spcPts val="1620"/>
+              </a:lnSpc>
+              <a:spcAft>
+                <a:spcPts val="300"/>
+              </a:spcAft>
+              <a:buNone/>
+            </a:pPr>
+            <a:r>
+              <a:rPr lang="en-US" sz="1200" dirty="0">
+                <a:solidFill>
+                  <a:srgbClr val="1A1A1A"/>
+                </a:solidFill>
+                <a:latin typeface="Georgia" pitchFamily="34" charset="0"/>
+                <a:ea typeface="Georgia" pitchFamily="34" charset="-122"/>
+                <a:cs typeface="Georgia" pitchFamily="34" charset="-120"/>
+              </a:rPr>
+              <a:t> weak evidence. The mature stance is to use the strong, study the moderate, and be skeptical of the weak."</a:t>
+            </a:r>
+            <a:endParaRPr lang="en-US" sz="1200" dirty="0"/>
+          </a:p>
+        </p:txBody>
+      </p:sp>
+      <p:sp>
+        <p:nvSpPr>
+          <p:cNvPr id="11" name="Text 9"/>
+          <p:cNvSpPr/>
+          <p:nvPr/>
+        </p:nvSpPr>
+        <p:spPr>
+          <a:xfrm>
+            <a:off x="406301" y="6106716"/>
             <a:ext cx="8498026" cy="213271"/>
           </a:xfrm>
           <a:prstGeom prst="rect">

--- a/exports/pptx/lessons/senior-module-03-ayurveda-good-health/day-04-modern-evidence.pptx
+++ b/exports/pptx/lessons/senior-module-03-ayurveda-good-health/day-04-modern-evidence.pptx
@@ -15,9 +15,14 @@
     <p:sldId id="263" r:id="rId9"/>
     <p:sldId id="264" r:id="rId10"/>
     <p:sldId id="265" r:id="rId11"/>
+    <p:sldId id="266" r:id="rId12"/>
+    <p:sldId id="267" r:id="rId13"/>
+    <p:sldId id="268" r:id="rId14"/>
+    <p:sldId id="269" r:id="rId15"/>
+    <p:sldId id="270" r:id="rId16"/>
   </p:sldIdLst>
   <p:notesMasterIdLst>
-    <p:notesMasterId r:id="rId12"/>
+    <p:notesMasterId r:id="rId17"/>
   </p:notesMasterIdLst>
   <p:sldSz cx="9144000" cy="5143500"/>
   <p:notesSz cx="5143500" cy="9144000"/>
@@ -623,6 +628,446 @@
             <a:fld id="{F7021451-1387-4CA6-816F-3879F97B5CBC}" type="slidenum">
               <a:rPr lang="en-US"/>
               <a:t>10</a:t>
+            </a:fld>
+            <a:endParaRPr lang="en-US"/>
+          </a:p>
+        </p:txBody>
+      </p:sp>
+    </p:spTree>
+    <p:extLst>
+      <p:ext uri="{BB962C8B-B14F-4D97-AF65-F5344CB8AC3E}">
+        <p14:creationId xmlns:p14="http://schemas.microsoft.com/office/powerpoint/2010/main" val="1024086991"/>
+      </p:ext>
+    </p:extLst>
+  </p:cSld>
+  <p:clrMapOvr>
+    <a:masterClrMapping/>
+  </p:clrMapOvr>
+</p:notes>
+</file>
+
+<file path=ppt/notesSlides/notesSlide11.xml><?xml version="1.0" encoding="utf-8"?>
+<p:notes xmlns:a="http://schemas.openxmlformats.org/drawingml/2006/main" xmlns:r="http://schemas.openxmlformats.org/officeDocument/2006/relationships" xmlns:p="http://schemas.openxmlformats.org/presentationml/2006/main">
+  <p:cSld>
+    <p:spTree>
+      <p:nvGrpSpPr>
+        <p:cNvPr id="1" name=""/>
+        <p:cNvGrpSpPr/>
+        <p:nvPr/>
+      </p:nvGrpSpPr>
+      <p:grpSpPr>
+        <a:xfrm>
+          <a:off x="0" y="0"/>
+          <a:ext cx="0" cy="0"/>
+          <a:chOff x="0" y="0"/>
+          <a:chExt cx="0" cy="0"/>
+        </a:xfrm>
+      </p:grpSpPr>
+      <p:sp>
+        <p:nvSpPr>
+          <p:cNvPr id="2" name="Slide Image Placeholder 1"/>
+          <p:cNvSpPr>
+            <a:spLocks noGrp="1" noRot="1" noChangeAspect="1"/>
+          </p:cNvSpPr>
+          <p:nvPr>
+            <p:ph type="sldImg"/>
+          </p:nvPr>
+        </p:nvSpPr>
+        <p:spPr/>
+      </p:sp>
+      <p:sp>
+        <p:nvSpPr>
+          <p:cNvPr id="3" name="Notes Placeholder 2"/>
+          <p:cNvSpPr>
+            <a:spLocks noGrp="1"/>
+          </p:cNvSpPr>
+          <p:nvPr>
+            <p:ph type="body" idx="1"/>
+          </p:nvPr>
+        </p:nvSpPr>
+        <p:spPr/>
+        <p:txBody>
+          <a:bodyPr/>
+          <a:lstStyle/>
+          <a:p>
+            <a:r>
+              <a:rPr lang="en-US" dirty="0"/>
+              <a:t/>
+            </a:r>
+            <a:endParaRPr lang="en-US" dirty="0"/>
+          </a:p>
+        </p:txBody>
+      </p:sp>
+      <p:sp>
+        <p:nvSpPr>
+          <p:cNvPr id="4" name="Slide Number Placeholder 3"/>
+          <p:cNvSpPr>
+            <a:spLocks noGrp="1"/>
+          </p:cNvSpPr>
+          <p:nvPr>
+            <p:ph type="sldNum" sz="quarter" idx="10"/>
+          </p:nvPr>
+        </p:nvSpPr>
+        <p:spPr/>
+        <p:txBody>
+          <a:bodyPr/>
+          <a:lstStyle/>
+          <a:p>
+            <a:fld id="{F7021451-1387-4CA6-816F-3879F97B5CBC}" type="slidenum">
+              <a:rPr lang="en-US"/>
+              <a:t>11</a:t>
+            </a:fld>
+            <a:endParaRPr lang="en-US"/>
+          </a:p>
+        </p:txBody>
+      </p:sp>
+    </p:spTree>
+    <p:extLst>
+      <p:ext uri="{BB962C8B-B14F-4D97-AF65-F5344CB8AC3E}">
+        <p14:creationId xmlns:p14="http://schemas.microsoft.com/office/powerpoint/2010/main" val="1024086991"/>
+      </p:ext>
+    </p:extLst>
+  </p:cSld>
+  <p:clrMapOvr>
+    <a:masterClrMapping/>
+  </p:clrMapOvr>
+</p:notes>
+</file>
+
+<file path=ppt/notesSlides/notesSlide12.xml><?xml version="1.0" encoding="utf-8"?>
+<p:notes xmlns:a="http://schemas.openxmlformats.org/drawingml/2006/main" xmlns:r="http://schemas.openxmlformats.org/officeDocument/2006/relationships" xmlns:p="http://schemas.openxmlformats.org/presentationml/2006/main">
+  <p:cSld>
+    <p:spTree>
+      <p:nvGrpSpPr>
+        <p:cNvPr id="1" name=""/>
+        <p:cNvGrpSpPr/>
+        <p:nvPr/>
+      </p:nvGrpSpPr>
+      <p:grpSpPr>
+        <a:xfrm>
+          <a:off x="0" y="0"/>
+          <a:ext cx="0" cy="0"/>
+          <a:chOff x="0" y="0"/>
+          <a:chExt cx="0" cy="0"/>
+        </a:xfrm>
+      </p:grpSpPr>
+      <p:sp>
+        <p:nvSpPr>
+          <p:cNvPr id="2" name="Slide Image Placeholder 1"/>
+          <p:cNvSpPr>
+            <a:spLocks noGrp="1" noRot="1" noChangeAspect="1"/>
+          </p:cNvSpPr>
+          <p:nvPr>
+            <p:ph type="sldImg"/>
+          </p:nvPr>
+        </p:nvSpPr>
+        <p:spPr/>
+      </p:sp>
+      <p:sp>
+        <p:nvSpPr>
+          <p:cNvPr id="3" name="Notes Placeholder 2"/>
+          <p:cNvSpPr>
+            <a:spLocks noGrp="1"/>
+          </p:cNvSpPr>
+          <p:nvPr>
+            <p:ph type="body" idx="1"/>
+          </p:nvPr>
+        </p:nvSpPr>
+        <p:spPr/>
+        <p:txBody>
+          <a:bodyPr/>
+          <a:lstStyle/>
+          <a:p>
+            <a:r>
+              <a:rPr lang="en-US" dirty="0"/>
+              <a:t/>
+            </a:r>
+            <a:endParaRPr lang="en-US" dirty="0"/>
+          </a:p>
+        </p:txBody>
+      </p:sp>
+      <p:sp>
+        <p:nvSpPr>
+          <p:cNvPr id="4" name="Slide Number Placeholder 3"/>
+          <p:cNvSpPr>
+            <a:spLocks noGrp="1"/>
+          </p:cNvSpPr>
+          <p:nvPr>
+            <p:ph type="sldNum" sz="quarter" idx="10"/>
+          </p:nvPr>
+        </p:nvSpPr>
+        <p:spPr/>
+        <p:txBody>
+          <a:bodyPr/>
+          <a:lstStyle/>
+          <a:p>
+            <a:fld id="{F7021451-1387-4CA6-816F-3879F97B5CBC}" type="slidenum">
+              <a:rPr lang="en-US"/>
+              <a:t>12</a:t>
+            </a:fld>
+            <a:endParaRPr lang="en-US"/>
+          </a:p>
+        </p:txBody>
+      </p:sp>
+    </p:spTree>
+    <p:extLst>
+      <p:ext uri="{BB962C8B-B14F-4D97-AF65-F5344CB8AC3E}">
+        <p14:creationId xmlns:p14="http://schemas.microsoft.com/office/powerpoint/2010/main" val="1024086991"/>
+      </p:ext>
+    </p:extLst>
+  </p:cSld>
+  <p:clrMapOvr>
+    <a:masterClrMapping/>
+  </p:clrMapOvr>
+</p:notes>
+</file>
+
+<file path=ppt/notesSlides/notesSlide13.xml><?xml version="1.0" encoding="utf-8"?>
+<p:notes xmlns:a="http://schemas.openxmlformats.org/drawingml/2006/main" xmlns:r="http://schemas.openxmlformats.org/officeDocument/2006/relationships" xmlns:p="http://schemas.openxmlformats.org/presentationml/2006/main">
+  <p:cSld>
+    <p:spTree>
+      <p:nvGrpSpPr>
+        <p:cNvPr id="1" name=""/>
+        <p:cNvGrpSpPr/>
+        <p:nvPr/>
+      </p:nvGrpSpPr>
+      <p:grpSpPr>
+        <a:xfrm>
+          <a:off x="0" y="0"/>
+          <a:ext cx="0" cy="0"/>
+          <a:chOff x="0" y="0"/>
+          <a:chExt cx="0" cy="0"/>
+        </a:xfrm>
+      </p:grpSpPr>
+      <p:sp>
+        <p:nvSpPr>
+          <p:cNvPr id="2" name="Slide Image Placeholder 1"/>
+          <p:cNvSpPr>
+            <a:spLocks noGrp="1" noRot="1" noChangeAspect="1"/>
+          </p:cNvSpPr>
+          <p:nvPr>
+            <p:ph type="sldImg"/>
+          </p:nvPr>
+        </p:nvSpPr>
+        <p:spPr/>
+      </p:sp>
+      <p:sp>
+        <p:nvSpPr>
+          <p:cNvPr id="3" name="Notes Placeholder 2"/>
+          <p:cNvSpPr>
+            <a:spLocks noGrp="1"/>
+          </p:cNvSpPr>
+          <p:nvPr>
+            <p:ph type="body" idx="1"/>
+          </p:nvPr>
+        </p:nvSpPr>
+        <p:spPr/>
+        <p:txBody>
+          <a:bodyPr/>
+          <a:lstStyle/>
+          <a:p>
+            <a:r>
+              <a:rPr lang="en-US" dirty="0"/>
+              <a:t/>
+            </a:r>
+            <a:endParaRPr lang="en-US" dirty="0"/>
+          </a:p>
+        </p:txBody>
+      </p:sp>
+      <p:sp>
+        <p:nvSpPr>
+          <p:cNvPr id="4" name="Slide Number Placeholder 3"/>
+          <p:cNvSpPr>
+            <a:spLocks noGrp="1"/>
+          </p:cNvSpPr>
+          <p:nvPr>
+            <p:ph type="sldNum" sz="quarter" idx="10"/>
+          </p:nvPr>
+        </p:nvSpPr>
+        <p:spPr/>
+        <p:txBody>
+          <a:bodyPr/>
+          <a:lstStyle/>
+          <a:p>
+            <a:fld id="{F7021451-1387-4CA6-816F-3879F97B5CBC}" type="slidenum">
+              <a:rPr lang="en-US"/>
+              <a:t>13</a:t>
+            </a:fld>
+            <a:endParaRPr lang="en-US"/>
+          </a:p>
+        </p:txBody>
+      </p:sp>
+    </p:spTree>
+    <p:extLst>
+      <p:ext uri="{BB962C8B-B14F-4D97-AF65-F5344CB8AC3E}">
+        <p14:creationId xmlns:p14="http://schemas.microsoft.com/office/powerpoint/2010/main" val="1024086991"/>
+      </p:ext>
+    </p:extLst>
+  </p:cSld>
+  <p:clrMapOvr>
+    <a:masterClrMapping/>
+  </p:clrMapOvr>
+</p:notes>
+</file>
+
+<file path=ppt/notesSlides/notesSlide14.xml><?xml version="1.0" encoding="utf-8"?>
+<p:notes xmlns:a="http://schemas.openxmlformats.org/drawingml/2006/main" xmlns:r="http://schemas.openxmlformats.org/officeDocument/2006/relationships" xmlns:p="http://schemas.openxmlformats.org/presentationml/2006/main">
+  <p:cSld>
+    <p:spTree>
+      <p:nvGrpSpPr>
+        <p:cNvPr id="1" name=""/>
+        <p:cNvGrpSpPr/>
+        <p:nvPr/>
+      </p:nvGrpSpPr>
+      <p:grpSpPr>
+        <a:xfrm>
+          <a:off x="0" y="0"/>
+          <a:ext cx="0" cy="0"/>
+          <a:chOff x="0" y="0"/>
+          <a:chExt cx="0" cy="0"/>
+        </a:xfrm>
+      </p:grpSpPr>
+      <p:sp>
+        <p:nvSpPr>
+          <p:cNvPr id="2" name="Slide Image Placeholder 1"/>
+          <p:cNvSpPr>
+            <a:spLocks noGrp="1" noRot="1" noChangeAspect="1"/>
+          </p:cNvSpPr>
+          <p:nvPr>
+            <p:ph type="sldImg"/>
+          </p:nvPr>
+        </p:nvSpPr>
+        <p:spPr/>
+      </p:sp>
+      <p:sp>
+        <p:nvSpPr>
+          <p:cNvPr id="3" name="Notes Placeholder 2"/>
+          <p:cNvSpPr>
+            <a:spLocks noGrp="1"/>
+          </p:cNvSpPr>
+          <p:nvPr>
+            <p:ph type="body" idx="1"/>
+          </p:nvPr>
+        </p:nvSpPr>
+        <p:spPr/>
+        <p:txBody>
+          <a:bodyPr/>
+          <a:lstStyle/>
+          <a:p>
+            <a:r>
+              <a:rPr lang="en-US" dirty="0"/>
+              <a:t/>
+            </a:r>
+            <a:endParaRPr lang="en-US" dirty="0"/>
+          </a:p>
+        </p:txBody>
+      </p:sp>
+      <p:sp>
+        <p:nvSpPr>
+          <p:cNvPr id="4" name="Slide Number Placeholder 3"/>
+          <p:cNvSpPr>
+            <a:spLocks noGrp="1"/>
+          </p:cNvSpPr>
+          <p:nvPr>
+            <p:ph type="sldNum" sz="quarter" idx="10"/>
+          </p:nvPr>
+        </p:nvSpPr>
+        <p:spPr/>
+        <p:txBody>
+          <a:bodyPr/>
+          <a:lstStyle/>
+          <a:p>
+            <a:fld id="{F7021451-1387-4CA6-816F-3879F97B5CBC}" type="slidenum">
+              <a:rPr lang="en-US"/>
+              <a:t>14</a:t>
+            </a:fld>
+            <a:endParaRPr lang="en-US"/>
+          </a:p>
+        </p:txBody>
+      </p:sp>
+    </p:spTree>
+    <p:extLst>
+      <p:ext uri="{BB962C8B-B14F-4D97-AF65-F5344CB8AC3E}">
+        <p14:creationId xmlns:p14="http://schemas.microsoft.com/office/powerpoint/2010/main" val="1024086991"/>
+      </p:ext>
+    </p:extLst>
+  </p:cSld>
+  <p:clrMapOvr>
+    <a:masterClrMapping/>
+  </p:clrMapOvr>
+</p:notes>
+</file>
+
+<file path=ppt/notesSlides/notesSlide15.xml><?xml version="1.0" encoding="utf-8"?>
+<p:notes xmlns:a="http://schemas.openxmlformats.org/drawingml/2006/main" xmlns:r="http://schemas.openxmlformats.org/officeDocument/2006/relationships" xmlns:p="http://schemas.openxmlformats.org/presentationml/2006/main">
+  <p:cSld>
+    <p:spTree>
+      <p:nvGrpSpPr>
+        <p:cNvPr id="1" name=""/>
+        <p:cNvGrpSpPr/>
+        <p:nvPr/>
+      </p:nvGrpSpPr>
+      <p:grpSpPr>
+        <a:xfrm>
+          <a:off x="0" y="0"/>
+          <a:ext cx="0" cy="0"/>
+          <a:chOff x="0" y="0"/>
+          <a:chExt cx="0" cy="0"/>
+        </a:xfrm>
+      </p:grpSpPr>
+      <p:sp>
+        <p:nvSpPr>
+          <p:cNvPr id="2" name="Slide Image Placeholder 1"/>
+          <p:cNvSpPr>
+            <a:spLocks noGrp="1" noRot="1" noChangeAspect="1"/>
+          </p:cNvSpPr>
+          <p:nvPr>
+            <p:ph type="sldImg"/>
+          </p:nvPr>
+        </p:nvSpPr>
+        <p:spPr/>
+      </p:sp>
+      <p:sp>
+        <p:nvSpPr>
+          <p:cNvPr id="3" name="Notes Placeholder 2"/>
+          <p:cNvSpPr>
+            <a:spLocks noGrp="1"/>
+          </p:cNvSpPr>
+          <p:nvPr>
+            <p:ph type="body" idx="1"/>
+          </p:nvPr>
+        </p:nvSpPr>
+        <p:spPr/>
+        <p:txBody>
+          <a:bodyPr/>
+          <a:lstStyle/>
+          <a:p>
+            <a:r>
+              <a:rPr lang="en-US" dirty="0"/>
+              <a:t/>
+            </a:r>
+            <a:endParaRPr lang="en-US" dirty="0"/>
+          </a:p>
+        </p:txBody>
+      </p:sp>
+      <p:sp>
+        <p:nvSpPr>
+          <p:cNvPr id="4" name="Slide Number Placeholder 3"/>
+          <p:cNvSpPr>
+            <a:spLocks noGrp="1"/>
+          </p:cNvSpPr>
+          <p:nvPr>
+            <p:ph type="sldNum" sz="quarter" idx="10"/>
+          </p:nvPr>
+        </p:nvSpPr>
+        <p:spPr/>
+        <p:txBody>
+          <a:bodyPr/>
+          <a:lstStyle/>
+          <a:p>
+            <a:fld id="{F7021451-1387-4CA6-816F-3879F97B5CBC}" type="slidenum">
+              <a:rPr lang="en-US"/>
+              <a:t>15</a:t>
             </a:fld>
             <a:endParaRPr lang="en-US"/>
           </a:p>
@@ -1876,102 +2321,6 @@
         </p:nvSpPr>
         <p:spPr>
           <a:xfrm>
-            <a:off x="406301" y="1223963"/>
-            <a:ext cx="8498026" cy="274290"/>
-          </a:xfrm>
-          <a:prstGeom prst="rect">
-            <a:avLst/>
-          </a:prstGeom>
-          <a:noFill/>
-          <a:ln/>
-        </p:spPr>
-        <p:txBody>
-          <a:bodyPr wrap="square" lIns="0" tIns="0" rIns="0" bIns="0" rtlCol="0" anchor="t"/>
-          <a:lstStyle/>
-          <a:p>
-            <a:pPr algn="l" indent="0" marL="0">
-              <a:lnSpc>
-                <a:spcPts val="2160"/>
-              </a:lnSpc>
-              <a:spcBef>
-                <a:spcPts val="600"/>
-              </a:spcBef>
-              <a:spcAft>
-                <a:spcPts val="800"/>
-              </a:spcAft>
-              <a:buNone/>
-            </a:pPr>
-            <a:r>
-              <a:rPr lang="en-US" sz="1800" b="1" dirty="0">
-                <a:solidFill>
-                  <a:srgbClr val="997929"/>
-                </a:solidFill>
-                <a:latin typeface="Times New Roman" pitchFamily="34" charset="0"/>
-                <a:ea typeface="Times New Roman" pitchFamily="34" charset="-122"/>
-                <a:cs typeface="Times New Roman" pitchFamily="34" charset="-120"/>
-              </a:rPr>
-              <a:t>Learning objective</a:t>
-            </a:r>
-            <a:endParaRPr lang="en-US" sz="1800" dirty="0"/>
-          </a:p>
-        </p:txBody>
-      </p:sp>
-      <p:sp>
-        <p:nvSpPr>
-          <p:cNvPr id="6" name="Text 4"/>
-          <p:cNvSpPr/>
-          <p:nvPr/>
-        </p:nvSpPr>
-        <p:spPr>
-          <a:xfrm>
-            <a:off x="406301" y="1637854"/>
-            <a:ext cx="8498026" cy="426541"/>
-          </a:xfrm>
-          <a:prstGeom prst="rect">
-            <a:avLst/>
-          </a:prstGeom>
-          <a:noFill/>
-          <a:ln/>
-        </p:spPr>
-        <p:txBody>
-          <a:bodyPr wrap="square" lIns="0" tIns="0" rIns="0" bIns="0" rtlCol="0" anchor="t"/>
-          <a:lstStyle/>
-          <a:p>
-            <a:pPr algn="l" indent="0" marL="0">
-              <a:lnSpc>
-                <a:spcPts val="1680"/>
-              </a:lnSpc>
-              <a:spcBef>
-                <a:spcPts val="300"/>
-              </a:spcBef>
-              <a:spcAft>
-                <a:spcPts val="300"/>
-              </a:spcAft>
-              <a:buNone/>
-            </a:pPr>
-            <a:r>
-              <a:rPr lang="en-US" sz="1200" dirty="0">
-                <a:solidFill>
-                  <a:srgbClr val="1A1A1A"/>
-                </a:solidFill>
-                <a:latin typeface="Georgia" pitchFamily="34" charset="0"/>
-                <a:ea typeface="Georgia" pitchFamily="34" charset="-122"/>
-                <a:cs typeface="Georgia" pitchFamily="34" charset="-120"/>
-              </a:rPr>
-              <a:t>Students review the modern evidence base for Ayurveda, distinguishing well-evidenced interventions from poorly-evidenced ones.</a:t>
-            </a:r>
-            <a:endParaRPr lang="en-US" sz="1200" dirty="0"/>
-          </a:p>
-        </p:txBody>
-      </p:sp>
-      <p:sp>
-        <p:nvSpPr>
-          <p:cNvPr id="7" name="Text 5"/>
-          <p:cNvSpPr/>
-          <p:nvPr/>
-        </p:nvSpPr>
-        <p:spPr>
-          <a:xfrm>
             <a:off x="406301" y="4434929"/>
             <a:ext cx="8498026" cy="213271"/>
           </a:xfrm>
@@ -2116,7 +2465,7 @@
                 <a:ea typeface="Times New Roman" pitchFamily="34" charset="-122"/>
                 <a:cs typeface="Times New Roman" pitchFamily="34" charset="-120"/>
               </a:rPr>
-              <a:t>Citation(s) used</a:t>
+              <a:t>Core (25 min) (cont.)</a:t>
             </a:r>
             <a:endParaRPr lang="en-US" sz="1800" dirty="0"/>
           </a:p>
@@ -2131,7 +2480,7 @@
         <p:spPr>
           <a:xfrm>
             <a:off x="406301" y="870942"/>
-            <a:ext cx="8498026" cy="426541"/>
+            <a:ext cx="8498026" cy="213271"/>
           </a:xfrm>
           <a:prstGeom prst="rect">
             <a:avLst/>
@@ -2164,10 +2513,251 @@
                 <a:ea typeface="Georgia" pitchFamily="34" charset="-122"/>
                 <a:cs typeface="Georgia" pitchFamily="34" charset="-120"/>
               </a:rPr>
-              <a:t>– Aggarwal, B. B., &amp; Harikumar, K. B. (2009). </a:t>
+              <a:t>Things that don't survive as well:</a:t>
+            </a:r>
+            <a:endParaRPr lang="en-US" sz="1200" dirty="0"/>
+          </a:p>
+        </p:txBody>
+      </p:sp>
+      <p:sp>
+        <p:nvSpPr>
+          <p:cNvPr id="5" name="Text 3"/>
+          <p:cNvSpPr/>
+          <p:nvPr/>
+        </p:nvSpPr>
+        <p:spPr>
+          <a:xfrm>
+            <a:off x="634901" y="1173063"/>
+            <a:ext cx="8102798" cy="525661"/>
+          </a:xfrm>
+          <a:prstGeom prst="rect">
+            <a:avLst/>
+          </a:prstGeom>
+          <a:noFill/>
+          <a:ln/>
+        </p:spPr>
+        <p:txBody>
+          <a:bodyPr wrap="square" lIns="0" tIns="0" rIns="0" bIns="0" rtlCol="0" anchor="t"/>
+          <a:lstStyle/>
+          <a:p>
+            <a:pPr algn="l" marL="342900" indent="-342900">
+              <a:lnSpc>
+                <a:spcPts val="1620"/>
+              </a:lnSpc>
+              <a:spcAft>
+                <a:spcPts val="300"/>
+              </a:spcAft>
+              <a:buSzPct val="100000"/>
+              <a:buChar char="•"/>
+            </a:pPr>
+            <a:r>
+              <a:rPr lang="en-US" sz="1200" dirty="0">
+                <a:solidFill>
+                  <a:srgbClr val="1A1A1A"/>
+                </a:solidFill>
+                <a:latin typeface="Georgia" pitchFamily="34" charset="0"/>
+                <a:ea typeface="Georgia" pitchFamily="34" charset="-122"/>
+                <a:cs typeface="Georgia" pitchFamily="34" charset="-120"/>
+              </a:rPr>
+              <a:t>Specific dosha-type prescriptions for unrelated conditions.</a:t>
+            </a:r>
+            <a:endParaRPr lang="en-US" sz="1200" dirty="0"/>
+          </a:p>
+          <a:p>
+            <a:pPr algn="l" marL="342900" indent="-342900">
+              <a:lnSpc>
+                <a:spcPts val="1620"/>
+              </a:lnSpc>
+              <a:spcAft>
+                <a:spcPts val="300"/>
+              </a:spcAft>
+              <a:buSzPct val="100000"/>
+              <a:buChar char="•"/>
+            </a:pPr>
+            <a:r>
+              <a:rPr lang="en-US" sz="1200" dirty="0">
+                <a:solidFill>
+                  <a:srgbClr val="1A1A1A"/>
+                </a:solidFill>
+                <a:latin typeface="Georgia" pitchFamily="34" charset="0"/>
+                <a:ea typeface="Georgia" pitchFamily="34" charset="-122"/>
+                <a:cs typeface="Georgia" pitchFamily="34" charset="-120"/>
+              </a:rPr>
+              <a:t>Mechanism claims that contradict modern physiology.</a:t>
+            </a:r>
+            <a:endParaRPr lang="en-US" sz="1200" dirty="0"/>
+          </a:p>
+        </p:txBody>
+      </p:sp>
+      <p:sp>
+        <p:nvSpPr>
+          <p:cNvPr id="6" name="Text 4"/>
+          <p:cNvSpPr/>
+          <p:nvPr/>
+        </p:nvSpPr>
+        <p:spPr>
+          <a:xfrm>
+            <a:off x="634901" y="1800225"/>
+            <a:ext cx="8102798" cy="487561"/>
+          </a:xfrm>
+          <a:prstGeom prst="rect">
+            <a:avLst/>
+          </a:prstGeom>
+          <a:noFill/>
+          <a:ln/>
+        </p:spPr>
+        <p:txBody>
+          <a:bodyPr wrap="square" lIns="0" tIns="0" rIns="0" bIns="0" rtlCol="0" anchor="t"/>
+          <a:lstStyle/>
+          <a:p>
+            <a:pPr algn="l" marL="342900" indent="-342900">
+              <a:lnSpc>
+                <a:spcPts val="1620"/>
+              </a:lnSpc>
+              <a:spcAft>
+                <a:spcPts val="300"/>
+              </a:spcAft>
+              <a:buSzPct val="100000"/>
+              <a:buChar char="•"/>
+            </a:pPr>
+            <a:r>
+              <a:rPr lang="en-US" sz="1200" b="1" dirty="0">
+                <a:solidFill>
+                  <a:srgbClr val="1A1A1A"/>
+                </a:solidFill>
+                <a:latin typeface="Georgia" pitchFamily="34" charset="0"/>
+                <a:ea typeface="Georgia" pitchFamily="34" charset="-122"/>
+                <a:cs typeface="Georgia" pitchFamily="34" charset="-120"/>
+              </a:rPr>
+              <a:t>The honest framing:</a:t>
             </a:r>
             <a:pPr algn="l" indent="0" marL="0">
               <a:lnSpc>
+                <a:spcPts val="1620"/>
+              </a:lnSpc>
+              <a:spcAft>
+                <a:spcPts val="300"/>
+              </a:spcAft>
+              <a:buNone/>
+            </a:pPr>
+            <a:r>
+              <a:rPr lang="en-US" sz="1200" dirty="0">
+                <a:solidFill>
+                  <a:srgbClr val="1A1A1A"/>
+                </a:solidFill>
+                <a:latin typeface="Georgia" pitchFamily="34" charset="0"/>
+                <a:ea typeface="Georgia" pitchFamily="34" charset="-122"/>
+                <a:cs typeface="Georgia" pitchFamily="34" charset="-120"/>
+              </a:rPr>
+              <a:t> "Ayurveda has </a:t>
+            </a:r>
+            <a:pPr algn="l" indent="0" marL="0">
+              <a:lnSpc>
+                <a:spcPts val="1620"/>
+              </a:lnSpc>
+              <a:spcAft>
+                <a:spcPts val="300"/>
+              </a:spcAft>
+              <a:buNone/>
+            </a:pPr>
+            <a:r>
+              <a:rPr lang="en-US" sz="1200" i="1" dirty="0">
+                <a:solidFill>
+                  <a:srgbClr val="1A1A1A"/>
+                </a:solidFill>
+                <a:latin typeface="Georgia" pitchFamily="34" charset="0"/>
+                <a:ea typeface="Georgia" pitchFamily="34" charset="-122"/>
+                <a:cs typeface="Georgia" pitchFamily="34" charset="-120"/>
+              </a:rPr>
+              <a:t>some</a:t>
+            </a:r>
+            <a:pPr algn="l" indent="0" marL="0">
+              <a:lnSpc>
+                <a:spcPts val="1620"/>
+              </a:lnSpc>
+              <a:spcAft>
+                <a:spcPts val="300"/>
+              </a:spcAft>
+              <a:buNone/>
+            </a:pPr>
+            <a:r>
+              <a:rPr lang="en-US" sz="1200" dirty="0">
+                <a:solidFill>
+                  <a:srgbClr val="1A1A1A"/>
+                </a:solidFill>
+                <a:latin typeface="Georgia" pitchFamily="34" charset="0"/>
+                <a:ea typeface="Georgia" pitchFamily="34" charset="-122"/>
+                <a:cs typeface="Georgia" pitchFamily="34" charset="-120"/>
+              </a:rPr>
+              <a:t> strong evidence and </a:t>
+            </a:r>
+            <a:pPr algn="l" indent="0" marL="0">
+              <a:lnSpc>
+                <a:spcPts val="1620"/>
+              </a:lnSpc>
+              <a:spcAft>
+                <a:spcPts val="300"/>
+              </a:spcAft>
+              <a:buNone/>
+            </a:pPr>
+            <a:r>
+              <a:rPr lang="en-US" sz="1200" i="1" dirty="0">
+                <a:solidFill>
+                  <a:srgbClr val="1A1A1A"/>
+                </a:solidFill>
+                <a:latin typeface="Georgia" pitchFamily="34" charset="0"/>
+                <a:ea typeface="Georgia" pitchFamily="34" charset="-122"/>
+                <a:cs typeface="Georgia" pitchFamily="34" charset="-120"/>
+              </a:rPr>
+              <a:t>some</a:t>
+            </a:r>
+            <a:pPr algn="l" indent="0" marL="0">
+              <a:lnSpc>
+                <a:spcPts val="1620"/>
+              </a:lnSpc>
+              <a:spcAft>
+                <a:spcPts val="300"/>
+              </a:spcAft>
+              <a:buNone/>
+            </a:pPr>
+            <a:r>
+              <a:rPr lang="en-US" sz="1200" dirty="0">
+                <a:solidFill>
+                  <a:srgbClr val="1A1A1A"/>
+                </a:solidFill>
+                <a:latin typeface="Georgia" pitchFamily="34" charset="0"/>
+                <a:ea typeface="Georgia" pitchFamily="34" charset="-122"/>
+                <a:cs typeface="Georgia" pitchFamily="34" charset="-120"/>
+              </a:rPr>
+              <a:t> weak evidence. The mature stance is to use the strong, study the moderate, and be skeptical of the weak."</a:t>
+            </a:r>
+            <a:endParaRPr lang="en-US" sz="1200" dirty="0"/>
+          </a:p>
+        </p:txBody>
+      </p:sp>
+      <p:sp>
+        <p:nvSpPr>
+          <p:cNvPr id="7" name="Text 5"/>
+          <p:cNvSpPr/>
+          <p:nvPr/>
+        </p:nvSpPr>
+        <p:spPr>
+          <a:xfrm>
+            <a:off x="406301" y="4434929"/>
+            <a:ext cx="8498026" cy="213271"/>
+          </a:xfrm>
+          <a:prstGeom prst="rect">
+            <a:avLst/>
+          </a:prstGeom>
+          <a:noFill/>
+          <a:ln/>
+        </p:spPr>
+        <p:txBody>
+          <a:bodyPr wrap="square" lIns="0" tIns="0" rIns="0" bIns="0" rtlCol="0" anchor="t"/>
+          <a:lstStyle/>
+          <a:p>
+            <a:pPr algn="l" indent="0" marL="0">
+              <a:lnSpc>
                 <a:spcPts val="1680"/>
               </a:lnSpc>
               <a:spcBef>
@@ -2179,6 +2769,482 @@
               <a:buNone/>
             </a:pPr>
             <a:r>
+              <a:rPr lang="en-US" sz="1200" dirty="0">
+                <a:solidFill>
+                  <a:srgbClr val="1A1A1A"/>
+                </a:solidFill>
+                <a:latin typeface="Georgia" pitchFamily="34" charset="0"/>
+                <a:ea typeface="Georgia" pitchFamily="34" charset="-122"/>
+                <a:cs typeface="Georgia" pitchFamily="34" charset="-120"/>
+              </a:rPr>
+              <a:t>Senior ·  · IKS Curriculum</a:t>
+            </a:r>
+            <a:endParaRPr lang="en-US" sz="1200" dirty="0"/>
+          </a:p>
+        </p:txBody>
+      </p:sp>
+    </p:spTree>
+  </p:cSld>
+  <p:clrMapOvr>
+    <a:masterClrMapping/>
+  </p:clrMapOvr>
+</p:sld>
+</file>
+
+<file path=ppt/slides/slide11.xml><?xml version="1.0" encoding="utf-8"?>
+<p:sld xmlns:a="http://schemas.openxmlformats.org/drawingml/2006/main" xmlns:r="http://schemas.openxmlformats.org/officeDocument/2006/relationships" xmlns:p="http://schemas.openxmlformats.org/presentationml/2006/main">
+  <p:cSld name="Slide 11">
+    <p:bg>
+      <p:bgPr>
+        <a:solidFill>
+          <a:srgbClr val="FAF7F2"/>
+        </a:solidFill>
+      </p:bgPr>
+    </p:bg>
+    <p:spTree>
+      <p:nvGrpSpPr>
+        <p:cNvPr id="1" name=""/>
+        <p:cNvGrpSpPr/>
+        <p:nvPr/>
+      </p:nvGrpSpPr>
+      <p:grpSpPr>
+        <a:xfrm>
+          <a:off x="0" y="0"/>
+          <a:ext cx="0" cy="0"/>
+          <a:chOff x="0" y="0"/>
+          <a:chExt cx="0" cy="0"/>
+        </a:xfrm>
+      </p:grpSpPr>
+      <p:sp>
+        <p:nvSpPr>
+          <p:cNvPr id="2" name="Text 0"/>
+          <p:cNvSpPr/>
+          <p:nvPr/>
+        </p:nvSpPr>
+        <p:spPr>
+          <a:xfrm>
+            <a:off x="0" y="0"/>
+            <a:ext cx="9144000" cy="101501"/>
+          </a:xfrm>
+          <a:prstGeom prst="rect">
+            <a:avLst/>
+          </a:prstGeom>
+          <a:solidFill>
+            <a:srgbClr val="5D1D2E"/>
+          </a:solidFill>
+          <a:ln/>
+        </p:spPr>
+        <p:txBody>
+          <a:bodyPr wrap="square" rtlCol="0" anchor="ctr"/>
+          <a:lstStyle/>
+          <a:p>
+            <a:pPr indent="0" marL="0">
+              <a:buNone/>
+            </a:pPr>
+            <a:endParaRPr lang="en-US" dirty="0"/>
+          </a:p>
+        </p:txBody>
+      </p:sp>
+      <p:sp>
+        <p:nvSpPr>
+          <p:cNvPr id="3" name="Text 1"/>
+          <p:cNvSpPr/>
+          <p:nvPr/>
+        </p:nvSpPr>
+        <p:spPr>
+          <a:xfrm>
+            <a:off x="406301" y="457051"/>
+            <a:ext cx="8498026" cy="274290"/>
+          </a:xfrm>
+          <a:prstGeom prst="rect">
+            <a:avLst/>
+          </a:prstGeom>
+          <a:noFill/>
+          <a:ln/>
+        </p:spPr>
+        <p:txBody>
+          <a:bodyPr wrap="square" lIns="0" tIns="0" rIns="0" bIns="0" rtlCol="0" anchor="t"/>
+          <a:lstStyle/>
+          <a:p>
+            <a:pPr algn="l" indent="0" marL="0">
+              <a:lnSpc>
+                <a:spcPts val="2160"/>
+              </a:lnSpc>
+              <a:spcBef>
+                <a:spcPts val="600"/>
+              </a:spcBef>
+              <a:spcAft>
+                <a:spcPts val="800"/>
+              </a:spcAft>
+              <a:buNone/>
+            </a:pPr>
+            <a:r>
+              <a:rPr lang="en-US" sz="1800" b="1" dirty="0">
+                <a:solidFill>
+                  <a:srgbClr val="997929"/>
+                </a:solidFill>
+                <a:latin typeface="Times New Roman" pitchFamily="34" charset="0"/>
+                <a:ea typeface="Times New Roman" pitchFamily="34" charset="-122"/>
+                <a:cs typeface="Times New Roman" pitchFamily="34" charset="-120"/>
+              </a:rPr>
+              <a:t>Activity (10 min) — Read a real abstract</a:t>
+            </a:r>
+            <a:endParaRPr lang="en-US" sz="1800" dirty="0"/>
+          </a:p>
+        </p:txBody>
+      </p:sp>
+      <p:sp>
+        <p:nvSpPr>
+          <p:cNvPr id="4" name="Text 2"/>
+          <p:cNvSpPr/>
+          <p:nvPr/>
+        </p:nvSpPr>
+        <p:spPr>
+          <a:xfrm>
+            <a:off x="406301" y="870942"/>
+            <a:ext cx="8498026" cy="213271"/>
+          </a:xfrm>
+          <a:prstGeom prst="rect">
+            <a:avLst/>
+          </a:prstGeom>
+          <a:noFill/>
+          <a:ln/>
+        </p:spPr>
+        <p:txBody>
+          <a:bodyPr wrap="square" lIns="0" tIns="0" rIns="0" bIns="0" rtlCol="0" anchor="t"/>
+          <a:lstStyle/>
+          <a:p>
+            <a:pPr algn="l" indent="0" marL="0">
+              <a:lnSpc>
+                <a:spcPts val="1680"/>
+              </a:lnSpc>
+              <a:spcBef>
+                <a:spcPts val="300"/>
+              </a:spcBef>
+              <a:spcAft>
+                <a:spcPts val="300"/>
+              </a:spcAft>
+              <a:buNone/>
+            </a:pPr>
+            <a:r>
+              <a:rPr lang="en-US" sz="1200" dirty="0">
+                <a:solidFill>
+                  <a:srgbClr val="1A1A1A"/>
+                </a:solidFill>
+                <a:latin typeface="Georgia" pitchFamily="34" charset="0"/>
+                <a:ea typeface="Georgia" pitchFamily="34" charset="-122"/>
+                <a:cs typeface="Georgia" pitchFamily="34" charset="-120"/>
+              </a:rPr>
+              <a:t>Hand out the Aggarwal &amp; Harikumar (2009) curcumin review abstract. Students read silently. Then answer:</a:t>
+            </a:r>
+            <a:endParaRPr lang="en-US" sz="1200" dirty="0"/>
+          </a:p>
+        </p:txBody>
+      </p:sp>
+      <p:sp>
+        <p:nvSpPr>
+          <p:cNvPr id="5" name="Text 3"/>
+          <p:cNvSpPr/>
+          <p:nvPr/>
+        </p:nvSpPr>
+        <p:spPr>
+          <a:xfrm>
+            <a:off x="634901" y="1173063"/>
+            <a:ext cx="8102798" cy="769441"/>
+          </a:xfrm>
+          <a:prstGeom prst="rect">
+            <a:avLst/>
+          </a:prstGeom>
+          <a:noFill/>
+          <a:ln/>
+        </p:spPr>
+        <p:txBody>
+          <a:bodyPr wrap="square" lIns="0" tIns="0" rIns="0" bIns="0" rtlCol="0" anchor="t"/>
+          <a:lstStyle/>
+          <a:p>
+            <a:pPr algn="l" marL="342900" indent="-342900">
+              <a:lnSpc>
+                <a:spcPts val="1620"/>
+              </a:lnSpc>
+              <a:spcAft>
+                <a:spcPts val="300"/>
+              </a:spcAft>
+              <a:buSzPct val="100000"/>
+              <a:buChar char="•"/>
+            </a:pPr>
+            <a:r>
+              <a:rPr lang="en-US" sz="1200" dirty="0">
+                <a:solidFill>
+                  <a:srgbClr val="1A1A1A"/>
+                </a:solidFill>
+                <a:latin typeface="Georgia" pitchFamily="34" charset="0"/>
+                <a:ea typeface="Georgia" pitchFamily="34" charset="-122"/>
+                <a:cs typeface="Georgia" pitchFamily="34" charset="-120"/>
+              </a:rPr>
+              <a:t>What conditions does it discuss curcumin for?</a:t>
+            </a:r>
+            <a:endParaRPr lang="en-US" sz="1200" dirty="0"/>
+          </a:p>
+          <a:p>
+            <a:pPr algn="l" marL="342900" indent="-342900">
+              <a:lnSpc>
+                <a:spcPts val="1620"/>
+              </a:lnSpc>
+              <a:spcAft>
+                <a:spcPts val="300"/>
+              </a:spcAft>
+              <a:buSzPct val="100000"/>
+              <a:buChar char="•"/>
+            </a:pPr>
+            <a:r>
+              <a:rPr lang="en-US" sz="1200" dirty="0">
+                <a:solidFill>
+                  <a:srgbClr val="1A1A1A"/>
+                </a:solidFill>
+                <a:latin typeface="Georgia" pitchFamily="34" charset="0"/>
+                <a:ea typeface="Georgia" pitchFamily="34" charset="-122"/>
+                <a:cs typeface="Georgia" pitchFamily="34" charset="-120"/>
+              </a:rPr>
+              <a:t>What's the strength of the evidence per condition?</a:t>
+            </a:r>
+            <a:endParaRPr lang="en-US" sz="1200" dirty="0"/>
+          </a:p>
+          <a:p>
+            <a:pPr algn="l" marL="342900" indent="-342900">
+              <a:lnSpc>
+                <a:spcPts val="1620"/>
+              </a:lnSpc>
+              <a:spcAft>
+                <a:spcPts val="300"/>
+              </a:spcAft>
+              <a:buSzPct val="100000"/>
+              <a:buChar char="•"/>
+            </a:pPr>
+            <a:r>
+              <a:rPr lang="en-US" sz="1200" dirty="0">
+                <a:solidFill>
+                  <a:srgbClr val="1A1A1A"/>
+                </a:solidFill>
+                <a:latin typeface="Georgia" pitchFamily="34" charset="0"/>
+                <a:ea typeface="Georgia" pitchFamily="34" charset="-122"/>
+                <a:cs typeface="Georgia" pitchFamily="34" charset="-120"/>
+              </a:rPr>
+              <a:t>What hedge words does the abstract use?</a:t>
+            </a:r>
+            <a:endParaRPr lang="en-US" sz="1200" dirty="0"/>
+          </a:p>
+        </p:txBody>
+      </p:sp>
+      <p:sp>
+        <p:nvSpPr>
+          <p:cNvPr id="6" name="Text 4"/>
+          <p:cNvSpPr/>
+          <p:nvPr/>
+        </p:nvSpPr>
+        <p:spPr>
+          <a:xfrm>
+            <a:off x="406301" y="4434929"/>
+            <a:ext cx="8498026" cy="213271"/>
+          </a:xfrm>
+          <a:prstGeom prst="rect">
+            <a:avLst/>
+          </a:prstGeom>
+          <a:noFill/>
+          <a:ln/>
+        </p:spPr>
+        <p:txBody>
+          <a:bodyPr wrap="square" lIns="0" tIns="0" rIns="0" bIns="0" rtlCol="0" anchor="t"/>
+          <a:lstStyle/>
+          <a:p>
+            <a:pPr algn="l" indent="0" marL="0">
+              <a:lnSpc>
+                <a:spcPts val="1680"/>
+              </a:lnSpc>
+              <a:spcBef>
+                <a:spcPts val="300"/>
+              </a:spcBef>
+              <a:spcAft>
+                <a:spcPts val="300"/>
+              </a:spcAft>
+              <a:buNone/>
+            </a:pPr>
+            <a:r>
+              <a:rPr lang="en-US" sz="1200" dirty="0">
+                <a:solidFill>
+                  <a:srgbClr val="1A1A1A"/>
+                </a:solidFill>
+                <a:latin typeface="Georgia" pitchFamily="34" charset="0"/>
+                <a:ea typeface="Georgia" pitchFamily="34" charset="-122"/>
+                <a:cs typeface="Georgia" pitchFamily="34" charset="-120"/>
+              </a:rPr>
+              <a:t>Senior ·  · IKS Curriculum</a:t>
+            </a:r>
+            <a:endParaRPr lang="en-US" sz="1200" dirty="0"/>
+          </a:p>
+        </p:txBody>
+      </p:sp>
+    </p:spTree>
+  </p:cSld>
+  <p:clrMapOvr>
+    <a:masterClrMapping/>
+  </p:clrMapOvr>
+</p:sld>
+</file>
+
+<file path=ppt/slides/slide12.xml><?xml version="1.0" encoding="utf-8"?>
+<p:sld xmlns:a="http://schemas.openxmlformats.org/drawingml/2006/main" xmlns:r="http://schemas.openxmlformats.org/officeDocument/2006/relationships" xmlns:p="http://schemas.openxmlformats.org/presentationml/2006/main">
+  <p:cSld name="Slide 12">
+    <p:bg>
+      <p:bgPr>
+        <a:solidFill>
+          <a:srgbClr val="FAF7F2"/>
+        </a:solidFill>
+      </p:bgPr>
+    </p:bg>
+    <p:spTree>
+      <p:nvGrpSpPr>
+        <p:cNvPr id="1" name=""/>
+        <p:cNvGrpSpPr/>
+        <p:nvPr/>
+      </p:nvGrpSpPr>
+      <p:grpSpPr>
+        <a:xfrm>
+          <a:off x="0" y="0"/>
+          <a:ext cx="0" cy="0"/>
+          <a:chOff x="0" y="0"/>
+          <a:chExt cx="0" cy="0"/>
+        </a:xfrm>
+      </p:grpSpPr>
+      <p:sp>
+        <p:nvSpPr>
+          <p:cNvPr id="2" name="Text 0"/>
+          <p:cNvSpPr/>
+          <p:nvPr/>
+        </p:nvSpPr>
+        <p:spPr>
+          <a:xfrm>
+            <a:off x="0" y="0"/>
+            <a:ext cx="9144000" cy="101501"/>
+          </a:xfrm>
+          <a:prstGeom prst="rect">
+            <a:avLst/>
+          </a:prstGeom>
+          <a:solidFill>
+            <a:srgbClr val="5D1D2E"/>
+          </a:solidFill>
+          <a:ln/>
+        </p:spPr>
+        <p:txBody>
+          <a:bodyPr wrap="square" rtlCol="0" anchor="ctr"/>
+          <a:lstStyle/>
+          <a:p>
+            <a:pPr indent="0" marL="0">
+              <a:buNone/>
+            </a:pPr>
+            <a:endParaRPr lang="en-US" dirty="0"/>
+          </a:p>
+        </p:txBody>
+      </p:sp>
+      <p:sp>
+        <p:nvSpPr>
+          <p:cNvPr id="3" name="Text 1"/>
+          <p:cNvSpPr/>
+          <p:nvPr/>
+        </p:nvSpPr>
+        <p:spPr>
+          <a:xfrm>
+            <a:off x="406301" y="457051"/>
+            <a:ext cx="8498026" cy="274290"/>
+          </a:xfrm>
+          <a:prstGeom prst="rect">
+            <a:avLst/>
+          </a:prstGeom>
+          <a:noFill/>
+          <a:ln/>
+        </p:spPr>
+        <p:txBody>
+          <a:bodyPr wrap="square" lIns="0" tIns="0" rIns="0" bIns="0" rtlCol="0" anchor="t"/>
+          <a:lstStyle/>
+          <a:p>
+            <a:pPr algn="l" indent="0" marL="0">
+              <a:lnSpc>
+                <a:spcPts val="2160"/>
+              </a:lnSpc>
+              <a:spcBef>
+                <a:spcPts val="600"/>
+              </a:spcBef>
+              <a:spcAft>
+                <a:spcPts val="800"/>
+              </a:spcAft>
+              <a:buNone/>
+            </a:pPr>
+            <a:r>
+              <a:rPr lang="en-US" sz="1800" b="1" dirty="0">
+                <a:solidFill>
+                  <a:srgbClr val="997929"/>
+                </a:solidFill>
+                <a:latin typeface="Times New Roman" pitchFamily="34" charset="0"/>
+                <a:ea typeface="Times New Roman" pitchFamily="34" charset="-122"/>
+                <a:cs typeface="Times New Roman" pitchFamily="34" charset="-120"/>
+              </a:rPr>
+              <a:t>Wrap-up (5 min)</a:t>
+            </a:r>
+            <a:endParaRPr lang="en-US" sz="1800" dirty="0"/>
+          </a:p>
+        </p:txBody>
+      </p:sp>
+      <p:sp>
+        <p:nvSpPr>
+          <p:cNvPr id="4" name="Text 2"/>
+          <p:cNvSpPr/>
+          <p:nvPr/>
+        </p:nvSpPr>
+        <p:spPr>
+          <a:xfrm>
+            <a:off x="634901" y="883593"/>
+            <a:ext cx="8102798" cy="281880"/>
+          </a:xfrm>
+          <a:prstGeom prst="rect">
+            <a:avLst/>
+          </a:prstGeom>
+          <a:noFill/>
+          <a:ln/>
+        </p:spPr>
+        <p:txBody>
+          <a:bodyPr wrap="square" lIns="0" tIns="0" rIns="0" bIns="0" rtlCol="0" anchor="t"/>
+          <a:lstStyle/>
+          <a:p>
+            <a:pPr algn="l" marL="342900" indent="-342900">
+              <a:lnSpc>
+                <a:spcPts val="1620"/>
+              </a:lnSpc>
+              <a:spcAft>
+                <a:spcPts val="300"/>
+              </a:spcAft>
+              <a:buSzPct val="100000"/>
+              <a:buChar char="•"/>
+            </a:pPr>
+            <a:r>
+              <a:rPr lang="en-US" sz="1200" dirty="0">
+                <a:solidFill>
+                  <a:srgbClr val="1A1A1A"/>
+                </a:solidFill>
+                <a:latin typeface="Georgia" pitchFamily="34" charset="0"/>
+                <a:ea typeface="Georgia" pitchFamily="34" charset="-122"/>
+                <a:cs typeface="Georgia" pitchFamily="34" charset="-120"/>
+              </a:rPr>
+              <a:t>Preview Day 5: </a:t>
+            </a:r>
+            <a:pPr algn="l" indent="0" marL="0">
+              <a:lnSpc>
+                <a:spcPts val="1620"/>
+              </a:lnSpc>
+              <a:spcAft>
+                <a:spcPts val="300"/>
+              </a:spcAft>
+              <a:buNone/>
+            </a:pPr>
+            <a:r>
               <a:rPr lang="en-US" sz="1200" i="1" dirty="0">
                 <a:solidFill>
                   <a:srgbClr val="1A1A1A"/>
@@ -2187,15 +3253,732 @@
                 <a:ea typeface="Georgia" pitchFamily="34" charset="-122"/>
                 <a:cs typeface="Georgia" pitchFamily="34" charset="-120"/>
               </a:rPr>
+              <a:t>"Tomorrow — mid-module + paper topic commitment."</a:t>
+            </a:r>
+            <a:endParaRPr lang="en-US" sz="1200" dirty="0"/>
+          </a:p>
+        </p:txBody>
+      </p:sp>
+      <p:sp>
+        <p:nvSpPr>
+          <p:cNvPr id="5" name="Text 3"/>
+          <p:cNvSpPr/>
+          <p:nvPr/>
+        </p:nvSpPr>
+        <p:spPr>
+          <a:xfrm>
+            <a:off x="406301" y="4434929"/>
+            <a:ext cx="8498026" cy="213271"/>
+          </a:xfrm>
+          <a:prstGeom prst="rect">
+            <a:avLst/>
+          </a:prstGeom>
+          <a:noFill/>
+          <a:ln/>
+        </p:spPr>
+        <p:txBody>
+          <a:bodyPr wrap="square" lIns="0" tIns="0" rIns="0" bIns="0" rtlCol="0" anchor="t"/>
+          <a:lstStyle/>
+          <a:p>
+            <a:pPr algn="l" indent="0" marL="0">
+              <a:lnSpc>
+                <a:spcPts val="1680"/>
+              </a:lnSpc>
+              <a:spcBef>
+                <a:spcPts val="300"/>
+              </a:spcBef>
+              <a:spcAft>
+                <a:spcPts val="300"/>
+              </a:spcAft>
+              <a:buNone/>
+            </a:pPr>
+            <a:r>
+              <a:rPr lang="en-US" sz="1200" dirty="0">
+                <a:solidFill>
+                  <a:srgbClr val="1A1A1A"/>
+                </a:solidFill>
+                <a:latin typeface="Georgia" pitchFamily="34" charset="0"/>
+                <a:ea typeface="Georgia" pitchFamily="34" charset="-122"/>
+                <a:cs typeface="Georgia" pitchFamily="34" charset="-120"/>
+              </a:rPr>
+              <a:t>Senior ·  · IKS Curriculum</a:t>
+            </a:r>
+            <a:endParaRPr lang="en-US" sz="1200" dirty="0"/>
+          </a:p>
+        </p:txBody>
+      </p:sp>
+    </p:spTree>
+  </p:cSld>
+  <p:clrMapOvr>
+    <a:masterClrMapping/>
+  </p:clrMapOvr>
+</p:sld>
+</file>
+
+<file path=ppt/slides/slide13.xml><?xml version="1.0" encoding="utf-8"?>
+<p:sld xmlns:a="http://schemas.openxmlformats.org/drawingml/2006/main" xmlns:r="http://schemas.openxmlformats.org/officeDocument/2006/relationships" xmlns:p="http://schemas.openxmlformats.org/presentationml/2006/main">
+  <p:cSld name="Slide 13">
+    <p:bg>
+      <p:bgPr>
+        <a:solidFill>
+          <a:srgbClr val="FAF7F2"/>
+        </a:solidFill>
+      </p:bgPr>
+    </p:bg>
+    <p:spTree>
+      <p:nvGrpSpPr>
+        <p:cNvPr id="1" name=""/>
+        <p:cNvGrpSpPr/>
+        <p:nvPr/>
+      </p:nvGrpSpPr>
+      <p:grpSpPr>
+        <a:xfrm>
+          <a:off x="0" y="0"/>
+          <a:ext cx="0" cy="0"/>
+          <a:chOff x="0" y="0"/>
+          <a:chExt cx="0" cy="0"/>
+        </a:xfrm>
+      </p:grpSpPr>
+      <p:sp>
+        <p:nvSpPr>
+          <p:cNvPr id="2" name="Text 0"/>
+          <p:cNvSpPr/>
+          <p:nvPr/>
+        </p:nvSpPr>
+        <p:spPr>
+          <a:xfrm>
+            <a:off x="0" y="0"/>
+            <a:ext cx="9144000" cy="101501"/>
+          </a:xfrm>
+          <a:prstGeom prst="rect">
+            <a:avLst/>
+          </a:prstGeom>
+          <a:solidFill>
+            <a:srgbClr val="5D1D2E"/>
+          </a:solidFill>
+          <a:ln/>
+        </p:spPr>
+        <p:txBody>
+          <a:bodyPr wrap="square" rtlCol="0" anchor="ctr"/>
+          <a:lstStyle/>
+          <a:p>
+            <a:pPr indent="0" marL="0">
+              <a:buNone/>
+            </a:pPr>
+            <a:endParaRPr lang="en-US" dirty="0"/>
+          </a:p>
+        </p:txBody>
+      </p:sp>
+      <p:sp>
+        <p:nvSpPr>
+          <p:cNvPr id="3" name="Text 1"/>
+          <p:cNvSpPr/>
+          <p:nvPr/>
+        </p:nvSpPr>
+        <p:spPr>
+          <a:xfrm>
+            <a:off x="406301" y="457051"/>
+            <a:ext cx="8498026" cy="274290"/>
+          </a:xfrm>
+          <a:prstGeom prst="rect">
+            <a:avLst/>
+          </a:prstGeom>
+          <a:noFill/>
+          <a:ln/>
+        </p:spPr>
+        <p:txBody>
+          <a:bodyPr wrap="square" lIns="0" tIns="0" rIns="0" bIns="0" rtlCol="0" anchor="t"/>
+          <a:lstStyle/>
+          <a:p>
+            <a:pPr algn="l" indent="0" marL="0">
+              <a:lnSpc>
+                <a:spcPts val="2160"/>
+              </a:lnSpc>
+              <a:spcBef>
+                <a:spcPts val="600"/>
+              </a:spcBef>
+              <a:spcAft>
+                <a:spcPts val="800"/>
+              </a:spcAft>
+              <a:buNone/>
+            </a:pPr>
+            <a:r>
+              <a:rPr lang="en-US" sz="1800" b="1" dirty="0">
+                <a:solidFill>
+                  <a:srgbClr val="997929"/>
+                </a:solidFill>
+                <a:latin typeface="Times New Roman" pitchFamily="34" charset="0"/>
+                <a:ea typeface="Times New Roman" pitchFamily="34" charset="-122"/>
+                <a:cs typeface="Times New Roman" pitchFamily="34" charset="-120"/>
+              </a:rPr>
+              <a:t>Differentiation</a:t>
+            </a:r>
+            <a:endParaRPr lang="en-US" sz="1800" dirty="0"/>
+          </a:p>
+        </p:txBody>
+      </p:sp>
+      <p:sp>
+        <p:nvSpPr>
+          <p:cNvPr id="4" name="Text 2"/>
+          <p:cNvSpPr/>
+          <p:nvPr/>
+        </p:nvSpPr>
+        <p:spPr>
+          <a:xfrm>
+            <a:off x="634901" y="883593"/>
+            <a:ext cx="8102798" cy="525661"/>
+          </a:xfrm>
+          <a:prstGeom prst="rect">
+            <a:avLst/>
+          </a:prstGeom>
+          <a:noFill/>
+          <a:ln/>
+        </p:spPr>
+        <p:txBody>
+          <a:bodyPr wrap="square" lIns="0" tIns="0" rIns="0" bIns="0" rtlCol="0" anchor="t"/>
+          <a:lstStyle/>
+          <a:p>
+            <a:pPr algn="l" marL="342900" indent="-342900">
+              <a:lnSpc>
+                <a:spcPts val="1620"/>
+              </a:lnSpc>
+              <a:spcAft>
+                <a:spcPts val="300"/>
+              </a:spcAft>
+              <a:buSzPct val="100000"/>
+              <a:buChar char="•"/>
+            </a:pPr>
+            <a:r>
+              <a:rPr lang="en-US" sz="1200" b="1" dirty="0">
+                <a:solidFill>
+                  <a:srgbClr val="1A1A1A"/>
+                </a:solidFill>
+                <a:latin typeface="Georgia" pitchFamily="34" charset="0"/>
+                <a:ea typeface="Georgia" pitchFamily="34" charset="-122"/>
+                <a:cs typeface="Georgia" pitchFamily="34" charset="-120"/>
+              </a:rPr>
+              <a:t>Tier up:</a:t>
+            </a:r>
+            <a:pPr algn="l" indent="0" marL="0">
+              <a:lnSpc>
+                <a:spcPts val="1620"/>
+              </a:lnSpc>
+              <a:spcAft>
+                <a:spcPts val="300"/>
+              </a:spcAft>
+              <a:buNone/>
+            </a:pPr>
+            <a:r>
+              <a:rPr lang="en-US" sz="1200" dirty="0">
+                <a:solidFill>
+                  <a:srgbClr val="1A1A1A"/>
+                </a:solidFill>
+                <a:latin typeface="Georgia" pitchFamily="34" charset="0"/>
+                <a:ea typeface="Georgia" pitchFamily="34" charset="-122"/>
+                <a:cs typeface="Georgia" pitchFamily="34" charset="-120"/>
+              </a:rPr>
+              <a:t> Read a full RCT — find one via Google Scholar on a specific Ayurvedic intervention. Critique.</a:t>
+            </a:r>
+            <a:endParaRPr lang="en-US" sz="1200" dirty="0"/>
+          </a:p>
+          <a:p>
+            <a:pPr algn="l" marL="342900" indent="-342900">
+              <a:lnSpc>
+                <a:spcPts val="1620"/>
+              </a:lnSpc>
+              <a:spcAft>
+                <a:spcPts val="300"/>
+              </a:spcAft>
+              <a:buSzPct val="100000"/>
+              <a:buChar char="•"/>
+            </a:pPr>
+            <a:r>
+              <a:rPr lang="en-US" sz="1200" b="1" dirty="0">
+                <a:solidFill>
+                  <a:srgbClr val="1A1A1A"/>
+                </a:solidFill>
+                <a:latin typeface="Georgia" pitchFamily="34" charset="0"/>
+                <a:ea typeface="Georgia" pitchFamily="34" charset="-122"/>
+                <a:cs typeface="Georgia" pitchFamily="34" charset="-120"/>
+              </a:rPr>
+              <a:t>Tier down:</a:t>
+            </a:r>
+            <a:pPr algn="l" indent="0" marL="0">
+              <a:lnSpc>
+                <a:spcPts val="1620"/>
+              </a:lnSpc>
+              <a:spcAft>
+                <a:spcPts val="300"/>
+              </a:spcAft>
+              <a:buNone/>
+            </a:pPr>
+            <a:r>
+              <a:rPr lang="en-US" sz="1200" dirty="0">
+                <a:solidFill>
+                  <a:srgbClr val="1A1A1A"/>
+                </a:solidFill>
+                <a:latin typeface="Georgia" pitchFamily="34" charset="0"/>
+                <a:ea typeface="Georgia" pitchFamily="34" charset="-122"/>
+                <a:cs typeface="Georgia" pitchFamily="34" charset="-120"/>
+              </a:rPr>
+              <a:t> Memorise the evidence-strength table.</a:t>
+            </a:r>
+            <a:endParaRPr lang="en-US" sz="1200" dirty="0"/>
+          </a:p>
+        </p:txBody>
+      </p:sp>
+      <p:sp>
+        <p:nvSpPr>
+          <p:cNvPr id="5" name="Text 3"/>
+          <p:cNvSpPr/>
+          <p:nvPr/>
+        </p:nvSpPr>
+        <p:spPr>
+          <a:xfrm>
+            <a:off x="406301" y="4434929"/>
+            <a:ext cx="8498026" cy="213271"/>
+          </a:xfrm>
+          <a:prstGeom prst="rect">
+            <a:avLst/>
+          </a:prstGeom>
+          <a:noFill/>
+          <a:ln/>
+        </p:spPr>
+        <p:txBody>
+          <a:bodyPr wrap="square" lIns="0" tIns="0" rIns="0" bIns="0" rtlCol="0" anchor="t"/>
+          <a:lstStyle/>
+          <a:p>
+            <a:pPr algn="l" indent="0" marL="0">
+              <a:lnSpc>
+                <a:spcPts val="1680"/>
+              </a:lnSpc>
+              <a:spcBef>
+                <a:spcPts val="300"/>
+              </a:spcBef>
+              <a:spcAft>
+                <a:spcPts val="300"/>
+              </a:spcAft>
+              <a:buNone/>
+            </a:pPr>
+            <a:r>
+              <a:rPr lang="en-US" sz="1200" dirty="0">
+                <a:solidFill>
+                  <a:srgbClr val="1A1A1A"/>
+                </a:solidFill>
+                <a:latin typeface="Georgia" pitchFamily="34" charset="0"/>
+                <a:ea typeface="Georgia" pitchFamily="34" charset="-122"/>
+                <a:cs typeface="Georgia" pitchFamily="34" charset="-120"/>
+              </a:rPr>
+              <a:t>Senior ·  · IKS Curriculum</a:t>
+            </a:r>
+            <a:endParaRPr lang="en-US" sz="1200" dirty="0"/>
+          </a:p>
+        </p:txBody>
+      </p:sp>
+    </p:spTree>
+  </p:cSld>
+  <p:clrMapOvr>
+    <a:masterClrMapping/>
+  </p:clrMapOvr>
+</p:sld>
+</file>
+
+<file path=ppt/slides/slide14.xml><?xml version="1.0" encoding="utf-8"?>
+<p:sld xmlns:a="http://schemas.openxmlformats.org/drawingml/2006/main" xmlns:r="http://schemas.openxmlformats.org/officeDocument/2006/relationships" xmlns:p="http://schemas.openxmlformats.org/presentationml/2006/main">
+  <p:cSld name="Slide 14">
+    <p:bg>
+      <p:bgPr>
+        <a:solidFill>
+          <a:srgbClr val="FAF7F2"/>
+        </a:solidFill>
+      </p:bgPr>
+    </p:bg>
+    <p:spTree>
+      <p:nvGrpSpPr>
+        <p:cNvPr id="1" name=""/>
+        <p:cNvGrpSpPr/>
+        <p:nvPr/>
+      </p:nvGrpSpPr>
+      <p:grpSpPr>
+        <a:xfrm>
+          <a:off x="0" y="0"/>
+          <a:ext cx="0" cy="0"/>
+          <a:chOff x="0" y="0"/>
+          <a:chExt cx="0" cy="0"/>
+        </a:xfrm>
+      </p:grpSpPr>
+      <p:sp>
+        <p:nvSpPr>
+          <p:cNvPr id="2" name="Text 0"/>
+          <p:cNvSpPr/>
+          <p:nvPr/>
+        </p:nvSpPr>
+        <p:spPr>
+          <a:xfrm>
+            <a:off x="0" y="0"/>
+            <a:ext cx="9144000" cy="101501"/>
+          </a:xfrm>
+          <a:prstGeom prst="rect">
+            <a:avLst/>
+          </a:prstGeom>
+          <a:solidFill>
+            <a:srgbClr val="5D1D2E"/>
+          </a:solidFill>
+          <a:ln/>
+        </p:spPr>
+        <p:txBody>
+          <a:bodyPr wrap="square" rtlCol="0" anchor="ctr"/>
+          <a:lstStyle/>
+          <a:p>
+            <a:pPr indent="0" marL="0">
+              <a:buNone/>
+            </a:pPr>
+            <a:endParaRPr lang="en-US" dirty="0"/>
+          </a:p>
+        </p:txBody>
+      </p:sp>
+      <p:sp>
+        <p:nvSpPr>
+          <p:cNvPr id="3" name="Text 1"/>
+          <p:cNvSpPr/>
+          <p:nvPr/>
+        </p:nvSpPr>
+        <p:spPr>
+          <a:xfrm>
+            <a:off x="406301" y="457051"/>
+            <a:ext cx="8498026" cy="274290"/>
+          </a:xfrm>
+          <a:prstGeom prst="rect">
+            <a:avLst/>
+          </a:prstGeom>
+          <a:noFill/>
+          <a:ln/>
+        </p:spPr>
+        <p:txBody>
+          <a:bodyPr wrap="square" lIns="0" tIns="0" rIns="0" bIns="0" rtlCol="0" anchor="t"/>
+          <a:lstStyle/>
+          <a:p>
+            <a:pPr algn="l" indent="0" marL="0">
+              <a:lnSpc>
+                <a:spcPts val="2160"/>
+              </a:lnSpc>
+              <a:spcBef>
+                <a:spcPts val="600"/>
+              </a:spcBef>
+              <a:spcAft>
+                <a:spcPts val="800"/>
+              </a:spcAft>
+              <a:buNone/>
+            </a:pPr>
+            <a:r>
+              <a:rPr lang="en-US" sz="1800" b="1" dirty="0">
+                <a:solidFill>
+                  <a:srgbClr val="997929"/>
+                </a:solidFill>
+                <a:latin typeface="Times New Roman" pitchFamily="34" charset="0"/>
+                <a:ea typeface="Times New Roman" pitchFamily="34" charset="-122"/>
+                <a:cs typeface="Times New Roman" pitchFamily="34" charset="-120"/>
+              </a:rPr>
+              <a:t>Teacher notes</a:t>
+            </a:r>
+            <a:endParaRPr lang="en-US" sz="1800" dirty="0"/>
+          </a:p>
+        </p:txBody>
+      </p:sp>
+      <p:sp>
+        <p:nvSpPr>
+          <p:cNvPr id="4" name="Text 2"/>
+          <p:cNvSpPr/>
+          <p:nvPr/>
+        </p:nvSpPr>
+        <p:spPr>
+          <a:xfrm>
+            <a:off x="634901" y="883593"/>
+            <a:ext cx="8102798" cy="731341"/>
+          </a:xfrm>
+          <a:prstGeom prst="rect">
+            <a:avLst/>
+          </a:prstGeom>
+          <a:noFill/>
+          <a:ln/>
+        </p:spPr>
+        <p:txBody>
+          <a:bodyPr wrap="square" lIns="0" tIns="0" rIns="0" bIns="0" rtlCol="0" anchor="t"/>
+          <a:lstStyle/>
+          <a:p>
+            <a:pPr algn="l" marL="342900" indent="-342900">
+              <a:lnSpc>
+                <a:spcPts val="1620"/>
+              </a:lnSpc>
+              <a:spcAft>
+                <a:spcPts val="300"/>
+              </a:spcAft>
+              <a:buSzPct val="100000"/>
+              <a:buChar char="•"/>
+            </a:pPr>
+            <a:r>
+              <a:rPr lang="en-US" sz="1200" dirty="0">
+                <a:solidFill>
+                  <a:srgbClr val="1A1A1A"/>
+                </a:solidFill>
+                <a:latin typeface="Georgia" pitchFamily="34" charset="0"/>
+                <a:ea typeface="Georgia" pitchFamily="34" charset="-122"/>
+                <a:cs typeface="Georgia" pitchFamily="34" charset="-120"/>
+              </a:rPr>
+              <a:t>The "evidence map" is the most important takeaway. Distinguish well-evidenced from weakly-evidenced. Don't lump.</a:t>
+            </a:r>
+            <a:endParaRPr lang="en-US" sz="1200" dirty="0"/>
+          </a:p>
+          <a:p>
+            <a:pPr algn="l" marL="342900" indent="-342900">
+              <a:lnSpc>
+                <a:spcPts val="1620"/>
+              </a:lnSpc>
+              <a:spcAft>
+                <a:spcPts val="300"/>
+              </a:spcAft>
+              <a:buSzPct val="100000"/>
+              <a:buChar char="•"/>
+            </a:pPr>
+            <a:r>
+              <a:rPr lang="en-US" sz="1200" dirty="0">
+                <a:solidFill>
+                  <a:srgbClr val="1A1A1A"/>
+                </a:solidFill>
+                <a:latin typeface="Georgia" pitchFamily="34" charset="0"/>
+                <a:ea typeface="Georgia" pitchFamily="34" charset="-122"/>
+                <a:cs typeface="Georgia" pitchFamily="34" charset="-120"/>
+              </a:rPr>
+              <a:t>Some students will resist the "weak evidence" verdict on parts they personally value. Validate the value; hold the evidence standard.</a:t>
+            </a:r>
+            <a:endParaRPr lang="en-US" sz="1200" dirty="0"/>
+          </a:p>
+        </p:txBody>
+      </p:sp>
+      <p:sp>
+        <p:nvSpPr>
+          <p:cNvPr id="5" name="Text 3"/>
+          <p:cNvSpPr/>
+          <p:nvPr/>
+        </p:nvSpPr>
+        <p:spPr>
+          <a:xfrm>
+            <a:off x="406301" y="4434929"/>
+            <a:ext cx="8498026" cy="213271"/>
+          </a:xfrm>
+          <a:prstGeom prst="rect">
+            <a:avLst/>
+          </a:prstGeom>
+          <a:noFill/>
+          <a:ln/>
+        </p:spPr>
+        <p:txBody>
+          <a:bodyPr wrap="square" lIns="0" tIns="0" rIns="0" bIns="0" rtlCol="0" anchor="t"/>
+          <a:lstStyle/>
+          <a:p>
+            <a:pPr algn="l" indent="0" marL="0">
+              <a:lnSpc>
+                <a:spcPts val="1680"/>
+              </a:lnSpc>
+              <a:spcBef>
+                <a:spcPts val="300"/>
+              </a:spcBef>
+              <a:spcAft>
+                <a:spcPts val="300"/>
+              </a:spcAft>
+              <a:buNone/>
+            </a:pPr>
+            <a:r>
+              <a:rPr lang="en-US" sz="1200" dirty="0">
+                <a:solidFill>
+                  <a:srgbClr val="1A1A1A"/>
+                </a:solidFill>
+                <a:latin typeface="Georgia" pitchFamily="34" charset="0"/>
+                <a:ea typeface="Georgia" pitchFamily="34" charset="-122"/>
+                <a:cs typeface="Georgia" pitchFamily="34" charset="-120"/>
+              </a:rPr>
+              <a:t>Senior ·  · IKS Curriculum</a:t>
+            </a:r>
+            <a:endParaRPr lang="en-US" sz="1200" dirty="0"/>
+          </a:p>
+        </p:txBody>
+      </p:sp>
+    </p:spTree>
+  </p:cSld>
+  <p:clrMapOvr>
+    <a:masterClrMapping/>
+  </p:clrMapOvr>
+</p:sld>
+</file>
+
+<file path=ppt/slides/slide15.xml><?xml version="1.0" encoding="utf-8"?>
+<p:sld xmlns:a="http://schemas.openxmlformats.org/drawingml/2006/main" xmlns:r="http://schemas.openxmlformats.org/officeDocument/2006/relationships" xmlns:p="http://schemas.openxmlformats.org/presentationml/2006/main">
+  <p:cSld name="Slide 15">
+    <p:bg>
+      <p:bgPr>
+        <a:solidFill>
+          <a:srgbClr val="FAF7F2"/>
+        </a:solidFill>
+      </p:bgPr>
+    </p:bg>
+    <p:spTree>
+      <p:nvGrpSpPr>
+        <p:cNvPr id="1" name=""/>
+        <p:cNvGrpSpPr/>
+        <p:nvPr/>
+      </p:nvGrpSpPr>
+      <p:grpSpPr>
+        <a:xfrm>
+          <a:off x="0" y="0"/>
+          <a:ext cx="0" cy="0"/>
+          <a:chOff x="0" y="0"/>
+          <a:chExt cx="0" cy="0"/>
+        </a:xfrm>
+      </p:grpSpPr>
+      <p:sp>
+        <p:nvSpPr>
+          <p:cNvPr id="2" name="Text 0"/>
+          <p:cNvSpPr/>
+          <p:nvPr/>
+        </p:nvSpPr>
+        <p:spPr>
+          <a:xfrm>
+            <a:off x="0" y="0"/>
+            <a:ext cx="9144000" cy="101501"/>
+          </a:xfrm>
+          <a:prstGeom prst="rect">
+            <a:avLst/>
+          </a:prstGeom>
+          <a:solidFill>
+            <a:srgbClr val="5D1D2E"/>
+          </a:solidFill>
+          <a:ln/>
+        </p:spPr>
+        <p:txBody>
+          <a:bodyPr wrap="square" rtlCol="0" anchor="ctr"/>
+          <a:lstStyle/>
+          <a:p>
+            <a:pPr indent="0" marL="0">
+              <a:buNone/>
+            </a:pPr>
+            <a:endParaRPr lang="en-US" dirty="0"/>
+          </a:p>
+        </p:txBody>
+      </p:sp>
+      <p:sp>
+        <p:nvSpPr>
+          <p:cNvPr id="3" name="Text 1"/>
+          <p:cNvSpPr/>
+          <p:nvPr/>
+        </p:nvSpPr>
+        <p:spPr>
+          <a:xfrm>
+            <a:off x="406301" y="457051"/>
+            <a:ext cx="8498026" cy="274290"/>
+          </a:xfrm>
+          <a:prstGeom prst="rect">
+            <a:avLst/>
+          </a:prstGeom>
+          <a:noFill/>
+          <a:ln/>
+        </p:spPr>
+        <p:txBody>
+          <a:bodyPr wrap="square" lIns="0" tIns="0" rIns="0" bIns="0" rtlCol="0" anchor="t"/>
+          <a:lstStyle/>
+          <a:p>
+            <a:pPr algn="l" indent="0" marL="0">
+              <a:lnSpc>
+                <a:spcPts val="2160"/>
+              </a:lnSpc>
+              <a:spcBef>
+                <a:spcPts val="600"/>
+              </a:spcBef>
+              <a:spcAft>
+                <a:spcPts val="800"/>
+              </a:spcAft>
+              <a:buNone/>
+            </a:pPr>
+            <a:r>
+              <a:rPr lang="en-US" sz="1800" b="1" dirty="0">
+                <a:solidFill>
+                  <a:srgbClr val="997929"/>
+                </a:solidFill>
+                <a:latin typeface="Times New Roman" pitchFamily="34" charset="0"/>
+                <a:ea typeface="Times New Roman" pitchFamily="34" charset="-122"/>
+                <a:cs typeface="Times New Roman" pitchFamily="34" charset="-120"/>
+              </a:rPr>
+              <a:t>Citation(s) used</a:t>
+            </a:r>
+            <a:endParaRPr lang="en-US" sz="1800" dirty="0"/>
+          </a:p>
+        </p:txBody>
+      </p:sp>
+      <p:sp>
+        <p:nvSpPr>
+          <p:cNvPr id="4" name="Text 2"/>
+          <p:cNvSpPr/>
+          <p:nvPr/>
+        </p:nvSpPr>
+        <p:spPr>
+          <a:xfrm>
+            <a:off x="634901" y="883593"/>
+            <a:ext cx="8102798" cy="769441"/>
+          </a:xfrm>
+          <a:prstGeom prst="rect">
+            <a:avLst/>
+          </a:prstGeom>
+          <a:noFill/>
+          <a:ln/>
+        </p:spPr>
+        <p:txBody>
+          <a:bodyPr wrap="square" lIns="0" tIns="0" rIns="0" bIns="0" rtlCol="0" anchor="t"/>
+          <a:lstStyle/>
+          <a:p>
+            <a:pPr algn="l" marL="342900" indent="-342900">
+              <a:lnSpc>
+                <a:spcPts val="1620"/>
+              </a:lnSpc>
+              <a:spcAft>
+                <a:spcPts val="300"/>
+              </a:spcAft>
+              <a:buSzPct val="100000"/>
+              <a:buChar char="•"/>
+            </a:pPr>
+            <a:r>
+              <a:rPr lang="en-US" sz="1200" dirty="0">
+                <a:solidFill>
+                  <a:srgbClr val="1A1A1A"/>
+                </a:solidFill>
+                <a:latin typeface="Georgia" pitchFamily="34" charset="0"/>
+                <a:ea typeface="Georgia" pitchFamily="34" charset="-122"/>
+                <a:cs typeface="Georgia" pitchFamily="34" charset="-120"/>
+              </a:rPr>
+              <a:t>Aggarwal, B. B., &amp; Harikumar, K. B. (2009). </a:t>
+            </a:r>
+            <a:pPr algn="l" indent="0" marL="0">
+              <a:lnSpc>
+                <a:spcPts val="1620"/>
+              </a:lnSpc>
+              <a:spcAft>
+                <a:spcPts val="300"/>
+              </a:spcAft>
+              <a:buNone/>
+            </a:pPr>
+            <a:r>
+              <a:rPr lang="en-US" sz="1200" i="1" dirty="0">
+                <a:solidFill>
+                  <a:srgbClr val="1A1A1A"/>
+                </a:solidFill>
+                <a:latin typeface="Georgia" pitchFamily="34" charset="0"/>
+                <a:ea typeface="Georgia" pitchFamily="34" charset="-122"/>
+                <a:cs typeface="Georgia" pitchFamily="34" charset="-120"/>
+              </a:rPr>
               <a:t>Int J Biochem Cell Biol</a:t>
             </a:r>
             <a:pPr algn="l" indent="0" marL="0">
               <a:lnSpc>
-                <a:spcPts val="1680"/>
-              </a:lnSpc>
-              <a:spcBef>
-                <a:spcPts val="300"/>
-              </a:spcBef>
+                <a:spcPts val="1620"/>
+              </a:lnSpc>
               <a:spcAft>
                 <a:spcPts val="300"/>
               </a:spcAft>
@@ -2210,15 +3993,36 @@
                 <a:ea typeface="Georgia" pitchFamily="34" charset="-122"/>
                 <a:cs typeface="Georgia" pitchFamily="34" charset="-120"/>
               </a:rPr>
-              <a:t>, 41(1), 40–59. – Panda, S. (2018). </a:t>
+              <a:t>, 41(1), 40–59.</a:t>
+            </a:r>
+            <a:endParaRPr lang="en-US" sz="1200" dirty="0"/>
+          </a:p>
+          <a:p>
+            <a:pPr algn="l" marL="342900" indent="-342900">
+              <a:lnSpc>
+                <a:spcPts val="1620"/>
+              </a:lnSpc>
+              <a:spcAft>
+                <a:spcPts val="300"/>
+              </a:spcAft>
+              <a:buSzPct val="100000"/>
+              <a:buChar char="•"/>
+            </a:pPr>
+            <a:r>
+              <a:rPr lang="en-US" sz="1200" dirty="0">
+                <a:solidFill>
+                  <a:srgbClr val="1A1A1A"/>
+                </a:solidFill>
+                <a:latin typeface="Georgia" pitchFamily="34" charset="0"/>
+                <a:ea typeface="Georgia" pitchFamily="34" charset="-122"/>
+                <a:cs typeface="Georgia" pitchFamily="34" charset="-120"/>
+              </a:rPr>
+              <a:t>Panda, S. (2018). </a:t>
             </a:r>
             <a:pPr algn="l" indent="0" marL="0">
               <a:lnSpc>
-                <a:spcPts val="1680"/>
-              </a:lnSpc>
-              <a:spcBef>
-                <a:spcPts val="300"/>
-              </a:spcBef>
+                <a:spcPts val="1620"/>
+              </a:lnSpc>
               <a:spcAft>
                 <a:spcPts val="300"/>
               </a:spcAft>
@@ -2237,11 +4041,8 @@
             </a:r>
             <a:pPr algn="l" indent="0" marL="0">
               <a:lnSpc>
-                <a:spcPts val="1680"/>
-              </a:lnSpc>
-              <a:spcBef>
-                <a:spcPts val="300"/>
-              </a:spcBef>
+                <a:spcPts val="1620"/>
+              </a:lnSpc>
               <a:spcAft>
                 <a:spcPts val="300"/>
               </a:spcAft>
@@ -2256,15 +4057,36 @@
                 <a:ea typeface="Georgia" pitchFamily="34" charset="-122"/>
                 <a:cs typeface="Georgia" pitchFamily="34" charset="-120"/>
               </a:rPr>
-              <a:t>. Rodale. – Streeter, C. C., et al. (2010). </a:t>
+              <a:t>. Rodale.</a:t>
+            </a:r>
+            <a:endParaRPr lang="en-US" sz="1200" dirty="0"/>
+          </a:p>
+          <a:p>
+            <a:pPr algn="l" marL="342900" indent="-342900">
+              <a:lnSpc>
+                <a:spcPts val="1620"/>
+              </a:lnSpc>
+              <a:spcAft>
+                <a:spcPts val="300"/>
+              </a:spcAft>
+              <a:buSzPct val="100000"/>
+              <a:buChar char="•"/>
+            </a:pPr>
+            <a:r>
+              <a:rPr lang="en-US" sz="1200" dirty="0">
+                <a:solidFill>
+                  <a:srgbClr val="1A1A1A"/>
+                </a:solidFill>
+                <a:latin typeface="Georgia" pitchFamily="34" charset="0"/>
+                <a:ea typeface="Georgia" pitchFamily="34" charset="-122"/>
+                <a:cs typeface="Georgia" pitchFamily="34" charset="-120"/>
+              </a:rPr>
+              <a:t>Streeter, C. C., et al. (2010). </a:t>
             </a:r>
             <a:pPr algn="l" indent="0" marL="0">
               <a:lnSpc>
-                <a:spcPts val="1680"/>
-              </a:lnSpc>
-              <a:spcBef>
-                <a:spcPts val="300"/>
-              </a:spcBef>
+                <a:spcPts val="1620"/>
+              </a:lnSpc>
               <a:spcAft>
                 <a:spcPts val="300"/>
               </a:spcAft>
@@ -2283,11 +4105,8 @@
             </a:r>
             <a:pPr algn="l" indent="0" marL="0">
               <a:lnSpc>
-                <a:spcPts val="1680"/>
-              </a:lnSpc>
-              <a:spcBef>
-                <a:spcPts val="300"/>
-              </a:spcBef>
+                <a:spcPts val="1620"/>
+              </a:lnSpc>
               <a:spcAft>
                 <a:spcPts val="300"/>
               </a:spcAft>
@@ -2460,7 +4279,7 @@
                 <a:ea typeface="Times New Roman" pitchFamily="34" charset="-122"/>
                 <a:cs typeface="Times New Roman" pitchFamily="34" charset="-120"/>
               </a:rPr>
-              <a:t>Materials</a:t>
+              <a:t>Learning objective</a:t>
             </a:r>
             <a:endParaRPr lang="en-US" sz="1800" dirty="0"/>
           </a:p>
@@ -2508,7 +4327,7 @@
                 <a:ea typeface="Georgia" pitchFamily="34" charset="-122"/>
                 <a:cs typeface="Georgia" pitchFamily="34" charset="-120"/>
               </a:rPr>
-              <a:t>– Printed abstract: Aggarwal &amp; Harikumar (2009) on curcumin – Printed extract: Panda (2018) on time-restricted eating – Whiteboard</a:t>
+              <a:t>Students review the modern evidence base for Ayurveda, distinguishing well-evidenced interventions from poorly-evidenced ones.</a:t>
             </a:r>
             <a:endParaRPr lang="en-US" sz="1200" dirty="0"/>
           </a:p>
@@ -2666,7 +4485,7 @@
                 <a:ea typeface="Times New Roman" pitchFamily="34" charset="-122"/>
                 <a:cs typeface="Times New Roman" pitchFamily="34" charset="-120"/>
               </a:rPr>
-              <a:t>Flow</a:t>
+              <a:t>Materials</a:t>
             </a:r>
             <a:endParaRPr lang="en-US" sz="1800" dirty="0"/>
           </a:p>
@@ -2675,6 +4494,100 @@
       <p:sp>
         <p:nvSpPr>
           <p:cNvPr id="4" name="Text 2"/>
+          <p:cNvSpPr/>
+          <p:nvPr/>
+        </p:nvSpPr>
+        <p:spPr>
+          <a:xfrm>
+            <a:off x="634901" y="883593"/>
+            <a:ext cx="8102798" cy="769441"/>
+          </a:xfrm>
+          <a:prstGeom prst="rect">
+            <a:avLst/>
+          </a:prstGeom>
+          <a:noFill/>
+          <a:ln/>
+        </p:spPr>
+        <p:txBody>
+          <a:bodyPr wrap="square" lIns="0" tIns="0" rIns="0" bIns="0" rtlCol="0" anchor="t"/>
+          <a:lstStyle/>
+          <a:p>
+            <a:pPr algn="l" marL="342900" indent="-342900">
+              <a:lnSpc>
+                <a:spcPts val="1620"/>
+              </a:lnSpc>
+              <a:spcAft>
+                <a:spcPts val="300"/>
+              </a:spcAft>
+              <a:buSzPct val="100000"/>
+              <a:buChar char="•"/>
+            </a:pPr>
+            <a:r>
+              <a:rPr lang="en-US" sz="1200" dirty="0">
+                <a:solidFill>
+                  <a:srgbClr val="1A1A1A"/>
+                </a:solidFill>
+                <a:latin typeface="Georgia" pitchFamily="34" charset="0"/>
+                <a:ea typeface="Georgia" pitchFamily="34" charset="-122"/>
+                <a:cs typeface="Georgia" pitchFamily="34" charset="-120"/>
+              </a:rPr>
+              <a:t>Printed abstract: Aggarwal &amp; Harikumar (2009) on curcumin</a:t>
+            </a:r>
+            <a:endParaRPr lang="en-US" sz="1200" dirty="0"/>
+          </a:p>
+          <a:p>
+            <a:pPr algn="l" marL="342900" indent="-342900">
+              <a:lnSpc>
+                <a:spcPts val="1620"/>
+              </a:lnSpc>
+              <a:spcAft>
+                <a:spcPts val="300"/>
+              </a:spcAft>
+              <a:buSzPct val="100000"/>
+              <a:buChar char="•"/>
+            </a:pPr>
+            <a:r>
+              <a:rPr lang="en-US" sz="1200" dirty="0">
+                <a:solidFill>
+                  <a:srgbClr val="1A1A1A"/>
+                </a:solidFill>
+                <a:latin typeface="Georgia" pitchFamily="34" charset="0"/>
+                <a:ea typeface="Georgia" pitchFamily="34" charset="-122"/>
+                <a:cs typeface="Georgia" pitchFamily="34" charset="-120"/>
+              </a:rPr>
+              <a:t>Printed extract: Panda (2018) on time-restricted eating</a:t>
+            </a:r>
+            <a:endParaRPr lang="en-US" sz="1200" dirty="0"/>
+          </a:p>
+          <a:p>
+            <a:pPr algn="l" marL="342900" indent="-342900">
+              <a:lnSpc>
+                <a:spcPts val="1620"/>
+              </a:lnSpc>
+              <a:spcAft>
+                <a:spcPts val="300"/>
+              </a:spcAft>
+              <a:buSzPct val="100000"/>
+              <a:buChar char="•"/>
+            </a:pPr>
+            <a:r>
+              <a:rPr lang="en-US" sz="1200" dirty="0">
+                <a:solidFill>
+                  <a:srgbClr val="1A1A1A"/>
+                </a:solidFill>
+                <a:latin typeface="Georgia" pitchFamily="34" charset="0"/>
+                <a:ea typeface="Georgia" pitchFamily="34" charset="-122"/>
+                <a:cs typeface="Georgia" pitchFamily="34" charset="-120"/>
+              </a:rPr>
+              <a:t>Whiteboard</a:t>
+            </a:r>
+            <a:endParaRPr lang="en-US" sz="1200" dirty="0"/>
+          </a:p>
+        </p:txBody>
+      </p:sp>
+      <p:sp>
+        <p:nvSpPr>
+          <p:cNvPr id="5" name="Text 3"/>
           <p:cNvSpPr/>
           <p:nvPr/>
         </p:nvSpPr>
@@ -2824,7 +4737,7 @@
                 <a:ea typeface="Times New Roman" pitchFamily="34" charset="-122"/>
                 <a:cs typeface="Times New Roman" pitchFamily="34" charset="-120"/>
               </a:rPr>
-              <a:t>Warm-up (5 min)</a:t>
+              <a:t>Flow</a:t>
             </a:r>
             <a:endParaRPr lang="en-US" sz="1800" dirty="0"/>
           </a:p>
@@ -2833,54 +4746,6 @@
       <p:sp>
         <p:nvSpPr>
           <p:cNvPr id="4" name="Text 2"/>
-          <p:cNvSpPr/>
-          <p:nvPr/>
-        </p:nvSpPr>
-        <p:spPr>
-          <a:xfrm>
-            <a:off x="406301" y="870942"/>
-            <a:ext cx="8498026" cy="213271"/>
-          </a:xfrm>
-          <a:prstGeom prst="rect">
-            <a:avLst/>
-          </a:prstGeom>
-          <a:noFill/>
-          <a:ln/>
-        </p:spPr>
-        <p:txBody>
-          <a:bodyPr wrap="square" lIns="0" tIns="0" rIns="0" bIns="0" rtlCol="0" anchor="t"/>
-          <a:lstStyle/>
-          <a:p>
-            <a:pPr algn="l" indent="0" marL="0">
-              <a:lnSpc>
-                <a:spcPts val="1680"/>
-              </a:lnSpc>
-              <a:spcBef>
-                <a:spcPts val="300"/>
-              </a:spcBef>
-              <a:spcAft>
-                <a:spcPts val="300"/>
-              </a:spcAft>
-              <a:buNone/>
-            </a:pPr>
-            <a:r>
-              <a:rPr lang="en-US" sz="1200" dirty="0">
-                <a:solidFill>
-                  <a:srgbClr val="1A1A1A"/>
-                </a:solidFill>
-                <a:latin typeface="Georgia" pitchFamily="34" charset="0"/>
-                <a:ea typeface="Georgia" pitchFamily="34" charset="-122"/>
-                <a:cs typeface="Georgia" pitchFamily="34" charset="-120"/>
-              </a:rPr>
-              <a:t>Recall: Tridosha clinical vs biomedical framing distinction.</a:t>
-            </a:r>
-            <a:endParaRPr lang="en-US" sz="1200" dirty="0"/>
-          </a:p>
-        </p:txBody>
-      </p:sp>
-      <p:sp>
-        <p:nvSpPr>
-          <p:cNvPr id="5" name="Text 3"/>
           <p:cNvSpPr/>
           <p:nvPr/>
         </p:nvSpPr>
@@ -3030,7 +4895,7 @@
                 <a:ea typeface="Times New Roman" pitchFamily="34" charset="-122"/>
                 <a:cs typeface="Times New Roman" pitchFamily="34" charset="-120"/>
               </a:rPr>
-              <a:t>Core (25 min)</a:t>
+              <a:t>Warm-up (5 min)</a:t>
             </a:r>
             <a:endParaRPr lang="en-US" sz="1800" dirty="0"/>
           </a:p>
@@ -3044,8 +4909,8 @@
         </p:nvSpPr>
         <p:spPr>
           <a:xfrm>
-            <a:off x="634901" y="883593"/>
-            <a:ext cx="8102798" cy="281880"/>
+            <a:off x="406301" y="870942"/>
+            <a:ext cx="8498026" cy="213271"/>
           </a:xfrm>
           <a:prstGeom prst="rect">
             <a:avLst/>
@@ -3057,31 +4922,13 @@
           <a:bodyPr wrap="square" lIns="0" tIns="0" rIns="0" bIns="0" rtlCol="0" anchor="t"/>
           <a:lstStyle/>
           <a:p>
-            <a:pPr algn="l" marL="342900" indent="-342900">
-              <a:lnSpc>
-                <a:spcPts val="1620"/>
-              </a:lnSpc>
-              <a:spcAft>
-                <a:spcPts val="300"/>
-              </a:spcAft>
-              <a:buSzPct val="100000"/>
-              <a:buChar char="•"/>
-            </a:pPr>
-            <a:r>
-              <a:rPr lang="en-US" sz="1200" b="1" dirty="0">
-                <a:solidFill>
-                  <a:srgbClr val="1A1A1A"/>
-                </a:solidFill>
-                <a:latin typeface="Georgia" pitchFamily="34" charset="0"/>
-                <a:ea typeface="Georgia" pitchFamily="34" charset="-122"/>
-                <a:cs typeface="Georgia" pitchFamily="34" charset="-120"/>
-              </a:rPr>
-              <a:t>Build the evidence map</a:t>
-            </a:r>
             <a:pPr algn="l" indent="0" marL="0">
               <a:lnSpc>
-                <a:spcPts val="1620"/>
-              </a:lnSpc>
+                <a:spcPts val="1680"/>
+              </a:lnSpc>
+              <a:spcBef>
+                <a:spcPts val="300"/>
+              </a:spcBef>
               <a:spcAft>
                 <a:spcPts val="300"/>
               </a:spcAft>
@@ -3096,7 +4943,7 @@
                 <a:ea typeface="Georgia" pitchFamily="34" charset="-122"/>
                 <a:cs typeface="Georgia" pitchFamily="34" charset="-120"/>
               </a:rPr>
-              <a:t> on the board:</a:t>
+              <a:t>Recall: Tridosha clinical vs biomedical framing distinction.</a:t>
             </a:r>
             <a:endParaRPr lang="en-US" sz="1200" dirty="0"/>
           </a:p>
@@ -3110,777 +4957,7 @@
         </p:nvSpPr>
         <p:spPr>
           <a:xfrm>
-            <a:off x="406301" y="1254323"/>
-            <a:ext cx="8498026" cy="213271"/>
-          </a:xfrm>
-          <a:prstGeom prst="rect">
-            <a:avLst/>
-          </a:prstGeom>
-          <a:noFill/>
-          <a:ln/>
-        </p:spPr>
-        <p:txBody>
-          <a:bodyPr wrap="square" lIns="0" tIns="0" rIns="0" bIns="0" rtlCol="0" anchor="t"/>
-          <a:lstStyle/>
-          <a:p>
-            <a:pPr algn="l" indent="0" marL="0">
-              <a:lnSpc>
-                <a:spcPts val="1680"/>
-              </a:lnSpc>
-              <a:spcBef>
-                <a:spcPts val="300"/>
-              </a:spcBef>
-              <a:spcAft>
-                <a:spcPts val="300"/>
-              </a:spcAft>
-              <a:buNone/>
-            </a:pPr>
-            <a:r>
-              <a:rPr lang="en-US" sz="1200" i="1" dirty="0">
-                <a:solidFill>
-                  <a:srgbClr val="1A1A1A"/>
-                </a:solidFill>
-                <a:latin typeface="Georgia" pitchFamily="34" charset="0"/>
-                <a:ea typeface="Georgia" pitchFamily="34" charset="-122"/>
-                <a:cs typeface="Georgia" pitchFamily="34" charset="-120"/>
-              </a:rPr>
-              <a:t>Each row: Intervention · Modern evidence · Quality.</a:t>
-            </a:r>
-            <a:endParaRPr lang="en-US" sz="1200" dirty="0"/>
-          </a:p>
-        </p:txBody>
-      </p:sp>
-      <p:sp>
-        <p:nvSpPr>
-          <p:cNvPr id="6" name="Text 4"/>
-          <p:cNvSpPr/>
-          <p:nvPr/>
-        </p:nvSpPr>
-        <p:spPr>
-          <a:xfrm>
-            <a:off x="634901" y="1556445"/>
-            <a:ext cx="8102798" cy="2194024"/>
-          </a:xfrm>
-          <a:prstGeom prst="rect">
-            <a:avLst/>
-          </a:prstGeom>
-          <a:noFill/>
-          <a:ln/>
-        </p:spPr>
-        <p:txBody>
-          <a:bodyPr wrap="square" lIns="0" tIns="0" rIns="0" bIns="0" rtlCol="0" anchor="t"/>
-          <a:lstStyle/>
-          <a:p>
-            <a:pPr algn="l" marL="342900" indent="-342900">
-              <a:lnSpc>
-                <a:spcPts val="1620"/>
-              </a:lnSpc>
-              <a:spcAft>
-                <a:spcPts val="300"/>
-              </a:spcAft>
-              <a:buSzPct val="100000"/>
-              <a:buChar char="•"/>
-            </a:pPr>
-            <a:r>
-              <a:rPr lang="en-US" sz="1200" b="1" dirty="0">
-                <a:solidFill>
-                  <a:srgbClr val="1A1A1A"/>
-                </a:solidFill>
-                <a:latin typeface="Georgia" pitchFamily="34" charset="0"/>
-                <a:ea typeface="Georgia" pitchFamily="34" charset="-122"/>
-                <a:cs typeface="Georgia" pitchFamily="34" charset="-120"/>
-              </a:rPr>
-              <a:t>Turmeric (curcumin) — anti-inflammatory</a:t>
-            </a:r>
-            <a:pPr algn="l" indent="0" marL="0">
-              <a:lnSpc>
-                <a:spcPts val="1620"/>
-              </a:lnSpc>
-              <a:spcAft>
-                <a:spcPts val="300"/>
-              </a:spcAft>
-              <a:buNone/>
-            </a:pPr>
-            <a:r>
-              <a:rPr lang="en-US" sz="1200" dirty="0">
-                <a:solidFill>
-                  <a:srgbClr val="1A1A1A"/>
-                </a:solidFill>
-                <a:latin typeface="Georgia" pitchFamily="34" charset="0"/>
-                <a:ea typeface="Georgia" pitchFamily="34" charset="-122"/>
-                <a:cs typeface="Georgia" pitchFamily="34" charset="-120"/>
-              </a:rPr>
-              <a:t> — Well-replicated; reviews in </a:t>
-            </a:r>
-            <a:pPr algn="l" indent="0" marL="0">
-              <a:lnSpc>
-                <a:spcPts val="1620"/>
-              </a:lnSpc>
-              <a:spcAft>
-                <a:spcPts val="300"/>
-              </a:spcAft>
-              <a:buNone/>
-            </a:pPr>
-            <a:r>
-              <a:rPr lang="en-US" sz="1200" i="1" dirty="0">
-                <a:solidFill>
-                  <a:srgbClr val="1A1A1A"/>
-                </a:solidFill>
-                <a:latin typeface="Georgia" pitchFamily="34" charset="0"/>
-                <a:ea typeface="Georgia" pitchFamily="34" charset="-122"/>
-                <a:cs typeface="Georgia" pitchFamily="34" charset="-120"/>
-              </a:rPr>
-              <a:t>Int J Biochem Cell Biol</a:t>
-            </a:r>
-            <a:pPr algn="l" indent="0" marL="0">
-              <a:lnSpc>
-                <a:spcPts val="1620"/>
-              </a:lnSpc>
-              <a:spcAft>
-                <a:spcPts val="300"/>
-              </a:spcAft>
-              <a:buNone/>
-            </a:pPr>
-            <a:r>
-              <a:rPr lang="en-US" sz="1200" dirty="0">
-                <a:solidFill>
-                  <a:srgbClr val="1A1A1A"/>
-                </a:solidFill>
-                <a:latin typeface="Georgia" pitchFamily="34" charset="0"/>
-                <a:ea typeface="Georgia" pitchFamily="34" charset="-122"/>
-                <a:cs typeface="Georgia" pitchFamily="34" charset="-120"/>
-              </a:rPr>
-              <a:t> · Strong</a:t>
-            </a:r>
-            <a:endParaRPr lang="en-US" sz="1200" dirty="0"/>
-          </a:p>
-          <a:p>
-            <a:pPr algn="l" marL="342900" indent="-342900">
-              <a:lnSpc>
-                <a:spcPts val="1620"/>
-              </a:lnSpc>
-              <a:spcAft>
-                <a:spcPts val="300"/>
-              </a:spcAft>
-              <a:buSzPct val="100000"/>
-              <a:buChar char="•"/>
-            </a:pPr>
-            <a:r>
-              <a:rPr lang="en-US" sz="1200" b="1" dirty="0">
-                <a:solidFill>
-                  <a:srgbClr val="1A1A1A"/>
-                </a:solidFill>
-                <a:latin typeface="Georgia" pitchFamily="34" charset="0"/>
-                <a:ea typeface="Georgia" pitchFamily="34" charset="-122"/>
-                <a:cs typeface="Georgia" pitchFamily="34" charset="-120"/>
-              </a:rPr>
-              <a:t>Time-restricted eating</a:t>
-            </a:r>
-            <a:pPr algn="l" indent="0" marL="0">
-              <a:lnSpc>
-                <a:spcPts val="1620"/>
-              </a:lnSpc>
-              <a:spcAft>
-                <a:spcPts val="300"/>
-              </a:spcAft>
-              <a:buNone/>
-            </a:pPr>
-            <a:r>
-              <a:rPr lang="en-US" sz="1200" dirty="0">
-                <a:solidFill>
-                  <a:srgbClr val="1A1A1A"/>
-                </a:solidFill>
-                <a:latin typeface="Georgia" pitchFamily="34" charset="0"/>
-                <a:ea typeface="Georgia" pitchFamily="34" charset="-122"/>
-                <a:cs typeface="Georgia" pitchFamily="34" charset="-120"/>
-              </a:rPr>
-              <a:t> (aligned with dinacharya midday-meal principle) — Panda et al. — strong evidence for metabolic benefits · Strong</a:t>
-            </a:r>
-            <a:endParaRPr lang="en-US" sz="1200" dirty="0"/>
-          </a:p>
-          <a:p>
-            <a:pPr algn="l" marL="342900" indent="-342900">
-              <a:lnSpc>
-                <a:spcPts val="1620"/>
-              </a:lnSpc>
-              <a:spcAft>
-                <a:spcPts val="300"/>
-              </a:spcAft>
-              <a:buSzPct val="100000"/>
-              <a:buChar char="•"/>
-            </a:pPr>
-            <a:r>
-              <a:rPr lang="en-US" sz="1200" b="1" dirty="0">
-                <a:solidFill>
-                  <a:srgbClr val="1A1A1A"/>
-                </a:solidFill>
-                <a:latin typeface="Georgia" pitchFamily="34" charset="0"/>
-                <a:ea typeface="Georgia" pitchFamily="34" charset="-122"/>
-                <a:cs typeface="Georgia" pitchFamily="34" charset="-120"/>
-              </a:rPr>
-              <a:t>Yoga + breath for HRV</a:t>
-            </a:r>
-            <a:pPr algn="l" indent="0" marL="0">
-              <a:lnSpc>
-                <a:spcPts val="1620"/>
-              </a:lnSpc>
-              <a:spcAft>
-                <a:spcPts val="300"/>
-              </a:spcAft>
-              <a:buNone/>
-            </a:pPr>
-            <a:r>
-              <a:rPr lang="en-US" sz="1200" dirty="0">
-                <a:solidFill>
-                  <a:srgbClr val="1A1A1A"/>
-                </a:solidFill>
-                <a:latin typeface="Georgia" pitchFamily="34" charset="0"/>
-                <a:ea typeface="Georgia" pitchFamily="34" charset="-122"/>
-                <a:cs typeface="Georgia" pitchFamily="34" charset="-120"/>
-              </a:rPr>
-              <a:t> — Streeter (2010), multiple studies · Moderate</a:t>
-            </a:r>
-            <a:endParaRPr lang="en-US" sz="1200" dirty="0"/>
-          </a:p>
-          <a:p>
-            <a:pPr algn="l" marL="342900" indent="-342900">
-              <a:lnSpc>
-                <a:spcPts val="1620"/>
-              </a:lnSpc>
-              <a:spcAft>
-                <a:spcPts val="300"/>
-              </a:spcAft>
-              <a:buSzPct val="100000"/>
-              <a:buChar char="•"/>
-            </a:pPr>
-            <a:r>
-              <a:rPr lang="en-US" sz="1200" b="1" dirty="0">
-                <a:solidFill>
-                  <a:srgbClr val="1A1A1A"/>
-                </a:solidFill>
-                <a:latin typeface="Georgia" pitchFamily="34" charset="0"/>
-                <a:ea typeface="Georgia" pitchFamily="34" charset="-122"/>
-                <a:cs typeface="Georgia" pitchFamily="34" charset="-120"/>
-              </a:rPr>
-              <a:t>Tulsi (Ocimum sanctum) adaptogenic</a:t>
-            </a:r>
-            <a:pPr algn="l" indent="0" marL="0">
-              <a:lnSpc>
-                <a:spcPts val="1620"/>
-              </a:lnSpc>
-              <a:spcAft>
-                <a:spcPts val="300"/>
-              </a:spcAft>
-              <a:buNone/>
-            </a:pPr>
-            <a:r>
-              <a:rPr lang="en-US" sz="1200" dirty="0">
-                <a:solidFill>
-                  <a:srgbClr val="1A1A1A"/>
-                </a:solidFill>
-                <a:latin typeface="Georgia" pitchFamily="34" charset="0"/>
-                <a:ea typeface="Georgia" pitchFamily="34" charset="-122"/>
-                <a:cs typeface="Georgia" pitchFamily="34" charset="-120"/>
-              </a:rPr>
-              <a:t> — Modest RCT support for stress reduction · Modest</a:t>
-            </a:r>
-            <a:endParaRPr lang="en-US" sz="1200" dirty="0"/>
-          </a:p>
-          <a:p>
-            <a:pPr algn="l" marL="342900" indent="-342900">
-              <a:lnSpc>
-                <a:spcPts val="1620"/>
-              </a:lnSpc>
-              <a:spcAft>
-                <a:spcPts val="300"/>
-              </a:spcAft>
-              <a:buSzPct val="100000"/>
-              <a:buChar char="•"/>
-            </a:pPr>
-            <a:r>
-              <a:rPr lang="en-US" sz="1200" b="1" dirty="0">
-                <a:solidFill>
-                  <a:srgbClr val="1A1A1A"/>
-                </a:solidFill>
-                <a:latin typeface="Georgia" pitchFamily="34" charset="0"/>
-                <a:ea typeface="Georgia" pitchFamily="34" charset="-122"/>
-                <a:cs typeface="Georgia" pitchFamily="34" charset="-120"/>
-              </a:rPr>
-              <a:t>Triphala for digestive function</a:t>
-            </a:r>
-            <a:pPr algn="l" indent="0" marL="0">
-              <a:lnSpc>
-                <a:spcPts val="1620"/>
-              </a:lnSpc>
-              <a:spcAft>
-                <a:spcPts val="300"/>
-              </a:spcAft>
-              <a:buNone/>
-            </a:pPr>
-            <a:r>
-              <a:rPr lang="en-US" sz="1200" dirty="0">
-                <a:solidFill>
-                  <a:srgbClr val="1A1A1A"/>
-                </a:solidFill>
-                <a:latin typeface="Georgia" pitchFamily="34" charset="0"/>
-                <a:ea typeface="Georgia" pitchFamily="34" charset="-122"/>
-                <a:cs typeface="Georgia" pitchFamily="34" charset="-120"/>
-              </a:rPr>
-              <a:t> — Some clinical evidence · Modest</a:t>
-            </a:r>
-            <a:endParaRPr lang="en-US" sz="1200" dirty="0"/>
-          </a:p>
-          <a:p>
-            <a:pPr algn="l" marL="342900" indent="-342900">
-              <a:lnSpc>
-                <a:spcPts val="1620"/>
-              </a:lnSpc>
-              <a:spcAft>
-                <a:spcPts val="300"/>
-              </a:spcAft>
-              <a:buSzPct val="100000"/>
-              <a:buChar char="•"/>
-            </a:pPr>
-            <a:r>
-              <a:rPr lang="en-US" sz="1200" b="1" dirty="0">
-                <a:solidFill>
-                  <a:srgbClr val="1A1A1A"/>
-                </a:solidFill>
-                <a:latin typeface="Georgia" pitchFamily="34" charset="0"/>
-                <a:ea typeface="Georgia" pitchFamily="34" charset="-122"/>
-                <a:cs typeface="Georgia" pitchFamily="34" charset="-120"/>
-              </a:rPr>
-              <a:t>Pulse diagnosis (nāḍī parīkṣā)</a:t>
-            </a:r>
-            <a:pPr algn="l" indent="0" marL="0">
-              <a:lnSpc>
-                <a:spcPts val="1620"/>
-              </a:lnSpc>
-              <a:spcAft>
-                <a:spcPts val="300"/>
-              </a:spcAft>
-              <a:buNone/>
-            </a:pPr>
-            <a:r>
-              <a:rPr lang="en-US" sz="1200" dirty="0">
-                <a:solidFill>
-                  <a:srgbClr val="1A1A1A"/>
-                </a:solidFill>
-                <a:latin typeface="Georgia" pitchFamily="34" charset="0"/>
-                <a:ea typeface="Georgia" pitchFamily="34" charset="-122"/>
-                <a:cs typeface="Georgia" pitchFamily="34" charset="-120"/>
-              </a:rPr>
-              <a:t> — Inter-rater agreement studies — mixed · Weak</a:t>
-            </a:r>
-            <a:endParaRPr lang="en-US" sz="1200" dirty="0"/>
-          </a:p>
-          <a:p>
-            <a:pPr algn="l" marL="342900" indent="-342900">
-              <a:lnSpc>
-                <a:spcPts val="1620"/>
-              </a:lnSpc>
-              <a:spcAft>
-                <a:spcPts val="300"/>
-              </a:spcAft>
-              <a:buSzPct val="100000"/>
-              <a:buChar char="•"/>
-            </a:pPr>
-            <a:r>
-              <a:rPr lang="en-US" sz="1200" b="1" dirty="0">
-                <a:solidFill>
-                  <a:srgbClr val="1A1A1A"/>
-                </a:solidFill>
-                <a:latin typeface="Georgia" pitchFamily="34" charset="0"/>
-                <a:ea typeface="Georgia" pitchFamily="34" charset="-122"/>
-                <a:cs typeface="Georgia" pitchFamily="34" charset="-120"/>
-              </a:rPr>
-              <a:t>Specific dosha-based dietary prescriptions</a:t>
-            </a:r>
-            <a:pPr algn="l" indent="0" marL="0">
-              <a:lnSpc>
-                <a:spcPts val="1620"/>
-              </a:lnSpc>
-              <a:spcAft>
-                <a:spcPts val="300"/>
-              </a:spcAft>
-              <a:buNone/>
-            </a:pPr>
-            <a:r>
-              <a:rPr lang="en-US" sz="1200" dirty="0">
-                <a:solidFill>
-                  <a:srgbClr val="1A1A1A"/>
-                </a:solidFill>
-                <a:latin typeface="Georgia" pitchFamily="34" charset="0"/>
-                <a:ea typeface="Georgia" pitchFamily="34" charset="-122"/>
-                <a:cs typeface="Georgia" pitchFamily="34" charset="-120"/>
-              </a:rPr>
-              <a:t> — Mixed; many specific claims fail RCT · Weak</a:t>
-            </a:r>
-            <a:endParaRPr lang="en-US" sz="1200" dirty="0"/>
-          </a:p>
-          <a:p>
-            <a:pPr algn="l" marL="342900" indent="-342900">
-              <a:lnSpc>
-                <a:spcPts val="1620"/>
-              </a:lnSpc>
-              <a:spcAft>
-                <a:spcPts val="300"/>
-              </a:spcAft>
-              <a:buSzPct val="100000"/>
-              <a:buChar char="•"/>
-            </a:pPr>
-            <a:r>
-              <a:rPr lang="en-US" sz="1200" b="1" dirty="0">
-                <a:solidFill>
-                  <a:srgbClr val="1A1A1A"/>
-                </a:solidFill>
-                <a:latin typeface="Georgia" pitchFamily="34" charset="0"/>
-                <a:ea typeface="Georgia" pitchFamily="34" charset="-122"/>
-                <a:cs typeface="Georgia" pitchFamily="34" charset="-120"/>
-              </a:rPr>
-              <a:t>Pancha-karma cleansing protocols</a:t>
-            </a:r>
-            <a:pPr algn="l" indent="0" marL="0">
-              <a:lnSpc>
-                <a:spcPts val="1620"/>
-              </a:lnSpc>
-              <a:spcAft>
-                <a:spcPts val="300"/>
-              </a:spcAft>
-              <a:buNone/>
-            </a:pPr>
-            <a:r>
-              <a:rPr lang="en-US" sz="1200" dirty="0">
-                <a:solidFill>
-                  <a:srgbClr val="1A1A1A"/>
-                </a:solidFill>
-                <a:latin typeface="Georgia" pitchFamily="34" charset="0"/>
-                <a:ea typeface="Georgia" pitchFamily="34" charset="-122"/>
-                <a:cs typeface="Georgia" pitchFamily="34" charset="-120"/>
-              </a:rPr>
-              <a:t> — Limited; mostly observational · Weak</a:t>
-            </a:r>
-            <a:endParaRPr lang="en-US" sz="1200" dirty="0"/>
-          </a:p>
-        </p:txBody>
-      </p:sp>
-      <p:sp>
-        <p:nvSpPr>
-          <p:cNvPr id="7" name="Text 5"/>
-          <p:cNvSpPr/>
-          <p:nvPr/>
-        </p:nvSpPr>
-        <p:spPr>
-          <a:xfrm>
-            <a:off x="634901" y="3851970"/>
-            <a:ext cx="8102798" cy="281880"/>
-          </a:xfrm>
-          <a:prstGeom prst="rect">
-            <a:avLst/>
-          </a:prstGeom>
-          <a:noFill/>
-          <a:ln/>
-        </p:spPr>
-        <p:txBody>
-          <a:bodyPr wrap="square" lIns="0" tIns="0" rIns="0" bIns="0" rtlCol="0" anchor="t"/>
-          <a:lstStyle/>
-          <a:p>
-            <a:pPr algn="l" marL="342900" indent="-342900">
-              <a:lnSpc>
-                <a:spcPts val="1620"/>
-              </a:lnSpc>
-              <a:spcAft>
-                <a:spcPts val="300"/>
-              </a:spcAft>
-              <a:buSzPct val="100000"/>
-              <a:buChar char="•"/>
-            </a:pPr>
-            <a:r>
-              <a:rPr lang="en-US" sz="1200" b="1" dirty="0">
-                <a:solidFill>
-                  <a:srgbClr val="1A1A1A"/>
-                </a:solidFill>
-                <a:latin typeface="Georgia" pitchFamily="34" charset="0"/>
-                <a:ea typeface="Georgia" pitchFamily="34" charset="-122"/>
-                <a:cs typeface="Georgia" pitchFamily="34" charset="-120"/>
-              </a:rPr>
-              <a:t>The pattern.</a:t>
-            </a:r>
-            <a:pPr algn="l" indent="0" marL="0">
-              <a:lnSpc>
-                <a:spcPts val="1620"/>
-              </a:lnSpc>
-              <a:spcAft>
-                <a:spcPts val="300"/>
-              </a:spcAft>
-              <a:buNone/>
-            </a:pPr>
-            <a:r>
-              <a:rPr lang="en-US" sz="1200" dirty="0">
-                <a:solidFill>
-                  <a:srgbClr val="1A1A1A"/>
-                </a:solidFill>
-                <a:latin typeface="Georgia" pitchFamily="34" charset="0"/>
-                <a:ea typeface="Georgia" pitchFamily="34" charset="-122"/>
-                <a:cs typeface="Georgia" pitchFamily="34" charset="-120"/>
-              </a:rPr>
-              <a:t> Things that survive evidence scrutiny:</a:t>
-            </a:r>
-            <a:endParaRPr lang="en-US" sz="1200" dirty="0"/>
-          </a:p>
-        </p:txBody>
-      </p:sp>
-      <p:sp>
-        <p:nvSpPr>
-          <p:cNvPr id="8" name="Text 6"/>
-          <p:cNvSpPr/>
-          <p:nvPr/>
-        </p:nvSpPr>
-        <p:spPr>
-          <a:xfrm>
-            <a:off x="406301" y="4222700"/>
-            <a:ext cx="8498026" cy="639812"/>
-          </a:xfrm>
-          <a:prstGeom prst="rect">
-            <a:avLst/>
-          </a:prstGeom>
-          <a:noFill/>
-          <a:ln/>
-        </p:spPr>
-        <p:txBody>
-          <a:bodyPr wrap="square" lIns="0" tIns="0" rIns="0" bIns="0" rtlCol="0" anchor="t"/>
-          <a:lstStyle/>
-          <a:p>
-            <a:pPr algn="l" indent="0" marL="0">
-              <a:lnSpc>
-                <a:spcPts val="1680"/>
-              </a:lnSpc>
-              <a:spcBef>
-                <a:spcPts val="300"/>
-              </a:spcBef>
-              <a:spcAft>
-                <a:spcPts val="300"/>
-              </a:spcAft>
-              <a:buNone/>
-            </a:pPr>
-            <a:r>
-              <a:rPr lang="en-US" sz="1200" dirty="0">
-                <a:solidFill>
-                  <a:srgbClr val="1A1A1A"/>
-                </a:solidFill>
-                <a:latin typeface="Georgia" pitchFamily="34" charset="0"/>
-                <a:ea typeface="Georgia" pitchFamily="34" charset="-122"/>
-                <a:cs typeface="Georgia" pitchFamily="34" charset="-120"/>
-              </a:rPr>
-              <a:t>– Single-compound herbs with measurable biochemical effects (turmeric, ashwagandha, tulsi).    – Lifestyle / behavioral interventions aligned with modern lifestyle medicine (regular sleep, meal timing, exercise).    – General yoga and breath interventions.</a:t>
-            </a:r>
-            <a:endParaRPr lang="en-US" sz="1200" dirty="0"/>
-          </a:p>
-        </p:txBody>
-      </p:sp>
-      <p:sp>
-        <p:nvSpPr>
-          <p:cNvPr id="9" name="Text 7"/>
-          <p:cNvSpPr/>
-          <p:nvPr/>
-        </p:nvSpPr>
-        <p:spPr>
-          <a:xfrm>
-            <a:off x="406301" y="4938713"/>
-            <a:ext cx="8498026" cy="426541"/>
-          </a:xfrm>
-          <a:prstGeom prst="rect">
-            <a:avLst/>
-          </a:prstGeom>
-          <a:noFill/>
-          <a:ln/>
-        </p:spPr>
-        <p:txBody>
-          <a:bodyPr wrap="square" lIns="0" tIns="0" rIns="0" bIns="0" rtlCol="0" anchor="t"/>
-          <a:lstStyle/>
-          <a:p>
-            <a:pPr algn="l" indent="0" marL="0">
-              <a:lnSpc>
-                <a:spcPts val="1680"/>
-              </a:lnSpc>
-              <a:spcBef>
-                <a:spcPts val="300"/>
-              </a:spcBef>
-              <a:spcAft>
-                <a:spcPts val="300"/>
-              </a:spcAft>
-              <a:buNone/>
-            </a:pPr>
-            <a:r>
-              <a:rPr lang="en-US" sz="1200" dirty="0">
-                <a:solidFill>
-                  <a:srgbClr val="1A1A1A"/>
-                </a:solidFill>
-                <a:latin typeface="Georgia" pitchFamily="34" charset="0"/>
-                <a:ea typeface="Georgia" pitchFamily="34" charset="-122"/>
-                <a:cs typeface="Georgia" pitchFamily="34" charset="-120"/>
-              </a:rPr>
-              <a:t>Things that don't survive as well:    – Specific dosha-type prescriptions for unrelated conditions.    – Mechanism claims that contradict modern physiology.</a:t>
-            </a:r>
-            <a:endParaRPr lang="en-US" sz="1200" dirty="0"/>
-          </a:p>
-        </p:txBody>
-      </p:sp>
-      <p:sp>
-        <p:nvSpPr>
-          <p:cNvPr id="10" name="Text 8"/>
-          <p:cNvSpPr/>
-          <p:nvPr/>
-        </p:nvSpPr>
-        <p:spPr>
-          <a:xfrm>
-            <a:off x="634901" y="5454104"/>
-            <a:ext cx="8102798" cy="487561"/>
-          </a:xfrm>
-          <a:prstGeom prst="rect">
-            <a:avLst/>
-          </a:prstGeom>
-          <a:noFill/>
-          <a:ln/>
-        </p:spPr>
-        <p:txBody>
-          <a:bodyPr wrap="square" lIns="0" tIns="0" rIns="0" bIns="0" rtlCol="0" anchor="t"/>
-          <a:lstStyle/>
-          <a:p>
-            <a:pPr algn="l" marL="342900" indent="-342900">
-              <a:lnSpc>
-                <a:spcPts val="1620"/>
-              </a:lnSpc>
-              <a:spcAft>
-                <a:spcPts val="300"/>
-              </a:spcAft>
-              <a:buSzPct val="100000"/>
-              <a:buChar char="•"/>
-            </a:pPr>
-            <a:r>
-              <a:rPr lang="en-US" sz="1200" b="1" dirty="0">
-                <a:solidFill>
-                  <a:srgbClr val="1A1A1A"/>
-                </a:solidFill>
-                <a:latin typeface="Georgia" pitchFamily="34" charset="0"/>
-                <a:ea typeface="Georgia" pitchFamily="34" charset="-122"/>
-                <a:cs typeface="Georgia" pitchFamily="34" charset="-120"/>
-              </a:rPr>
-              <a:t>The honest framing:</a:t>
-            </a:r>
-            <a:pPr algn="l" indent="0" marL="0">
-              <a:lnSpc>
-                <a:spcPts val="1620"/>
-              </a:lnSpc>
-              <a:spcAft>
-                <a:spcPts val="300"/>
-              </a:spcAft>
-              <a:buNone/>
-            </a:pPr>
-            <a:r>
-              <a:rPr lang="en-US" sz="1200" dirty="0">
-                <a:solidFill>
-                  <a:srgbClr val="1A1A1A"/>
-                </a:solidFill>
-                <a:latin typeface="Georgia" pitchFamily="34" charset="0"/>
-                <a:ea typeface="Georgia" pitchFamily="34" charset="-122"/>
-                <a:cs typeface="Georgia" pitchFamily="34" charset="-120"/>
-              </a:rPr>
-              <a:t> "Ayurveda has </a:t>
-            </a:r>
-            <a:pPr algn="l" indent="0" marL="0">
-              <a:lnSpc>
-                <a:spcPts val="1620"/>
-              </a:lnSpc>
-              <a:spcAft>
-                <a:spcPts val="300"/>
-              </a:spcAft>
-              <a:buNone/>
-            </a:pPr>
-            <a:r>
-              <a:rPr lang="en-US" sz="1200" i="1" dirty="0">
-                <a:solidFill>
-                  <a:srgbClr val="1A1A1A"/>
-                </a:solidFill>
-                <a:latin typeface="Georgia" pitchFamily="34" charset="0"/>
-                <a:ea typeface="Georgia" pitchFamily="34" charset="-122"/>
-                <a:cs typeface="Georgia" pitchFamily="34" charset="-120"/>
-              </a:rPr>
-              <a:t>some</a:t>
-            </a:r>
-            <a:pPr algn="l" indent="0" marL="0">
-              <a:lnSpc>
-                <a:spcPts val="1620"/>
-              </a:lnSpc>
-              <a:spcAft>
-                <a:spcPts val="300"/>
-              </a:spcAft>
-              <a:buNone/>
-            </a:pPr>
-            <a:r>
-              <a:rPr lang="en-US" sz="1200" dirty="0">
-                <a:solidFill>
-                  <a:srgbClr val="1A1A1A"/>
-                </a:solidFill>
-                <a:latin typeface="Georgia" pitchFamily="34" charset="0"/>
-                <a:ea typeface="Georgia" pitchFamily="34" charset="-122"/>
-                <a:cs typeface="Georgia" pitchFamily="34" charset="-120"/>
-              </a:rPr>
-              <a:t> strong evidence and </a:t>
-            </a:r>
-            <a:pPr algn="l" indent="0" marL="0">
-              <a:lnSpc>
-                <a:spcPts val="1620"/>
-              </a:lnSpc>
-              <a:spcAft>
-                <a:spcPts val="300"/>
-              </a:spcAft>
-              <a:buNone/>
-            </a:pPr>
-            <a:r>
-              <a:rPr lang="en-US" sz="1200" i="1" dirty="0">
-                <a:solidFill>
-                  <a:srgbClr val="1A1A1A"/>
-                </a:solidFill>
-                <a:latin typeface="Georgia" pitchFamily="34" charset="0"/>
-                <a:ea typeface="Georgia" pitchFamily="34" charset="-122"/>
-                <a:cs typeface="Georgia" pitchFamily="34" charset="-120"/>
-              </a:rPr>
-              <a:t>some</a:t>
-            </a:r>
-            <a:pPr algn="l" indent="0" marL="0">
-              <a:lnSpc>
-                <a:spcPts val="1620"/>
-              </a:lnSpc>
-              <a:spcAft>
-                <a:spcPts val="300"/>
-              </a:spcAft>
-              <a:buNone/>
-            </a:pPr>
-            <a:r>
-              <a:rPr lang="en-US" sz="1200" dirty="0">
-                <a:solidFill>
-                  <a:srgbClr val="1A1A1A"/>
-                </a:solidFill>
-                <a:latin typeface="Georgia" pitchFamily="34" charset="0"/>
-                <a:ea typeface="Georgia" pitchFamily="34" charset="-122"/>
-                <a:cs typeface="Georgia" pitchFamily="34" charset="-120"/>
-              </a:rPr>
-              <a:t> weak evidence. The mature stance is to use the strong, study the moderate, and be skeptical of the weak."</a:t>
-            </a:r>
-            <a:endParaRPr lang="en-US" sz="1200" dirty="0"/>
-          </a:p>
-        </p:txBody>
-      </p:sp>
-      <p:sp>
-        <p:nvSpPr>
-          <p:cNvPr id="11" name="Text 9"/>
-          <p:cNvSpPr/>
-          <p:nvPr/>
-        </p:nvSpPr>
-        <p:spPr>
-          <a:xfrm>
-            <a:off x="406301" y="6106716"/>
+            <a:off x="406301" y="4434929"/>
             <a:ext cx="8498026" cy="213271"/>
           </a:xfrm>
           <a:prstGeom prst="rect">
@@ -4024,7 +5101,7 @@
                 <a:ea typeface="Times New Roman" pitchFamily="34" charset="-122"/>
                 <a:cs typeface="Times New Roman" pitchFamily="34" charset="-120"/>
               </a:rPr>
-              <a:t>Activity (10 min) — Read a real abstract</a:t>
+              <a:t>Core (25 min)</a:t>
             </a:r>
             <a:endParaRPr lang="en-US" sz="1800" dirty="0"/>
           </a:p>
@@ -4038,8 +5115,8 @@
         </p:nvSpPr>
         <p:spPr>
           <a:xfrm>
-            <a:off x="406301" y="870942"/>
-            <a:ext cx="8498026" cy="639812"/>
+            <a:off x="634901" y="883593"/>
+            <a:ext cx="8102798" cy="281880"/>
           </a:xfrm>
           <a:prstGeom prst="rect">
             <a:avLst/>
@@ -4051,8 +5128,74 @@
           <a:bodyPr wrap="square" lIns="0" tIns="0" rIns="0" bIns="0" rtlCol="0" anchor="t"/>
           <a:lstStyle/>
           <a:p>
+            <a:pPr algn="l" marL="342900" indent="-342900">
+              <a:lnSpc>
+                <a:spcPts val="1620"/>
+              </a:lnSpc>
+              <a:spcAft>
+                <a:spcPts val="300"/>
+              </a:spcAft>
+              <a:buSzPct val="100000"/>
+              <a:buChar char="•"/>
+            </a:pPr>
+            <a:r>
+              <a:rPr lang="en-US" sz="1200" b="1" dirty="0">
+                <a:solidFill>
+                  <a:srgbClr val="1A1A1A"/>
+                </a:solidFill>
+                <a:latin typeface="Georgia" pitchFamily="34" charset="0"/>
+                <a:ea typeface="Georgia" pitchFamily="34" charset="-122"/>
+                <a:cs typeface="Georgia" pitchFamily="34" charset="-120"/>
+              </a:rPr>
+              <a:t>Build the evidence map</a:t>
+            </a:r>
             <a:pPr algn="l" indent="0" marL="0">
               <a:lnSpc>
+                <a:spcPts val="1620"/>
+              </a:lnSpc>
+              <a:spcAft>
+                <a:spcPts val="300"/>
+              </a:spcAft>
+              <a:buNone/>
+            </a:pPr>
+            <a:r>
+              <a:rPr lang="en-US" sz="1200" dirty="0">
+                <a:solidFill>
+                  <a:srgbClr val="1A1A1A"/>
+                </a:solidFill>
+                <a:latin typeface="Georgia" pitchFamily="34" charset="0"/>
+                <a:ea typeface="Georgia" pitchFamily="34" charset="-122"/>
+                <a:cs typeface="Georgia" pitchFamily="34" charset="-120"/>
+              </a:rPr>
+              <a:t> on the board:</a:t>
+            </a:r>
+            <a:endParaRPr lang="en-US" sz="1200" dirty="0"/>
+          </a:p>
+        </p:txBody>
+      </p:sp>
+      <p:sp>
+        <p:nvSpPr>
+          <p:cNvPr id="5" name="Text 3"/>
+          <p:cNvSpPr/>
+          <p:nvPr/>
+        </p:nvSpPr>
+        <p:spPr>
+          <a:xfrm>
+            <a:off x="406301" y="1254323"/>
+            <a:ext cx="8498026" cy="213271"/>
+          </a:xfrm>
+          <a:prstGeom prst="rect">
+            <a:avLst/>
+          </a:prstGeom>
+          <a:noFill/>
+          <a:ln/>
+        </p:spPr>
+        <p:txBody>
+          <a:bodyPr wrap="square" lIns="0" tIns="0" rIns="0" bIns="0" rtlCol="0" anchor="t"/>
+          <a:lstStyle/>
+          <a:p>
+            <a:pPr algn="l" indent="0" marL="0">
+              <a:lnSpc>
                 <a:spcPts val="1680"/>
               </a:lnSpc>
               <a:spcBef>
@@ -4064,15 +5207,15 @@
               <a:buNone/>
             </a:pPr>
             <a:r>
-              <a:rPr lang="en-US" sz="1200" dirty="0">
-                <a:solidFill>
-                  <a:srgbClr val="1A1A1A"/>
-                </a:solidFill>
-                <a:latin typeface="Georgia" pitchFamily="34" charset="0"/>
-                <a:ea typeface="Georgia" pitchFamily="34" charset="-122"/>
-                <a:cs typeface="Georgia" pitchFamily="34" charset="-120"/>
-              </a:rPr>
-              <a:t>Hand out the Aggarwal &amp; Harikumar (2009) curcumin review abstract. Students read silently. Then answer: – What conditions does it discuss curcumin for? – What's the strength of the evidence per condition? – What hedge words does the abstract use?</a:t>
+              <a:rPr lang="en-US" sz="1200" i="1" dirty="0">
+                <a:solidFill>
+                  <a:srgbClr val="1A1A1A"/>
+                </a:solidFill>
+                <a:latin typeface="Georgia" pitchFamily="34" charset="0"/>
+                <a:ea typeface="Georgia" pitchFamily="34" charset="-122"/>
+                <a:cs typeface="Georgia" pitchFamily="34" charset="-120"/>
+              </a:rPr>
+              <a:t>Each row: Intervention · Modern evidence · Quality.</a:t>
             </a:r>
             <a:endParaRPr lang="en-US" sz="1200" dirty="0"/>
           </a:p>
@@ -4080,7 +5223,7 @@
       </p:sp>
       <p:sp>
         <p:nvSpPr>
-          <p:cNvPr id="5" name="Text 3"/>
+          <p:cNvPr id="6" name="Text 4"/>
           <p:cNvSpPr/>
           <p:nvPr/>
         </p:nvSpPr>
@@ -4230,7 +5373,7 @@
                 <a:ea typeface="Times New Roman" pitchFamily="34" charset="-122"/>
                 <a:cs typeface="Times New Roman" pitchFamily="34" charset="-120"/>
               </a:rPr>
-              <a:t>Wrap-up (5 min)</a:t>
+              <a:t>Core (25 min) (cont.)</a:t>
             </a:r>
             <a:endParaRPr lang="en-US" sz="1800" dirty="0"/>
           </a:p>
@@ -4244,8 +5387,8 @@
         </p:nvSpPr>
         <p:spPr>
           <a:xfrm>
-            <a:off x="406301" y="870942"/>
-            <a:ext cx="8498026" cy="213271"/>
+            <a:off x="634901" y="883593"/>
+            <a:ext cx="8102798" cy="1706463"/>
           </a:xfrm>
           <a:prstGeom prst="rect">
             <a:avLst/>
@@ -4257,13 +5400,31 @@
           <a:bodyPr wrap="square" lIns="0" tIns="0" rIns="0" bIns="0" rtlCol="0" anchor="t"/>
           <a:lstStyle/>
           <a:p>
+            <a:pPr algn="l" marL="342900" indent="-342900">
+              <a:lnSpc>
+                <a:spcPts val="1620"/>
+              </a:lnSpc>
+              <a:spcAft>
+                <a:spcPts val="300"/>
+              </a:spcAft>
+              <a:buSzPct val="100000"/>
+              <a:buChar char="•"/>
+            </a:pPr>
+            <a:r>
+              <a:rPr lang="en-US" sz="1200" b="1" dirty="0">
+                <a:solidFill>
+                  <a:srgbClr val="1A1A1A"/>
+                </a:solidFill>
+                <a:latin typeface="Georgia" pitchFamily="34" charset="0"/>
+                <a:ea typeface="Georgia" pitchFamily="34" charset="-122"/>
+                <a:cs typeface="Georgia" pitchFamily="34" charset="-120"/>
+              </a:rPr>
+              <a:t>Turmeric (curcumin) — anti-inflammatory</a:t>
+            </a:r>
             <a:pPr algn="l" indent="0" marL="0">
               <a:lnSpc>
-                <a:spcPts val="1680"/>
-              </a:lnSpc>
-              <a:spcBef>
-                <a:spcPts val="300"/>
-              </a:spcBef>
+                <a:spcPts val="1620"/>
+              </a:lnSpc>
               <a:spcAft>
                 <a:spcPts val="300"/>
               </a:spcAft>
@@ -4278,15 +5439,12 @@
                 <a:ea typeface="Georgia" pitchFamily="34" charset="-122"/>
                 <a:cs typeface="Georgia" pitchFamily="34" charset="-120"/>
               </a:rPr>
-              <a:t>– Preview Day 5: </a:t>
+              <a:t> — Well-replicated; reviews in </a:t>
             </a:r>
             <a:pPr algn="l" indent="0" marL="0">
               <a:lnSpc>
-                <a:spcPts val="1680"/>
-              </a:lnSpc>
-              <a:spcBef>
-                <a:spcPts val="300"/>
-              </a:spcBef>
+                <a:spcPts val="1620"/>
+              </a:lnSpc>
               <a:spcAft>
                 <a:spcPts val="300"/>
               </a:spcAft>
@@ -4301,7 +5459,247 @@
                 <a:ea typeface="Georgia" pitchFamily="34" charset="-122"/>
                 <a:cs typeface="Georgia" pitchFamily="34" charset="-120"/>
               </a:rPr>
-              <a:t>"Tomorrow — mid-module + paper topic commitment."</a:t>
+              <a:t>Int J Biochem Cell Biol</a:t>
+            </a:r>
+            <a:pPr algn="l" indent="0" marL="0">
+              <a:lnSpc>
+                <a:spcPts val="1620"/>
+              </a:lnSpc>
+              <a:spcAft>
+                <a:spcPts val="300"/>
+              </a:spcAft>
+              <a:buNone/>
+            </a:pPr>
+            <a:r>
+              <a:rPr lang="en-US" sz="1200" dirty="0">
+                <a:solidFill>
+                  <a:srgbClr val="1A1A1A"/>
+                </a:solidFill>
+                <a:latin typeface="Georgia" pitchFamily="34" charset="0"/>
+                <a:ea typeface="Georgia" pitchFamily="34" charset="-122"/>
+                <a:cs typeface="Georgia" pitchFamily="34" charset="-120"/>
+              </a:rPr>
+              <a:t> · Strong</a:t>
+            </a:r>
+            <a:endParaRPr lang="en-US" sz="1200" dirty="0"/>
+          </a:p>
+          <a:p>
+            <a:pPr algn="l" marL="342900" indent="-342900">
+              <a:lnSpc>
+                <a:spcPts val="1620"/>
+              </a:lnSpc>
+              <a:spcAft>
+                <a:spcPts val="300"/>
+              </a:spcAft>
+              <a:buSzPct val="100000"/>
+              <a:buChar char="•"/>
+            </a:pPr>
+            <a:r>
+              <a:rPr lang="en-US" sz="1200" b="1" dirty="0">
+                <a:solidFill>
+                  <a:srgbClr val="1A1A1A"/>
+                </a:solidFill>
+                <a:latin typeface="Georgia" pitchFamily="34" charset="0"/>
+                <a:ea typeface="Georgia" pitchFamily="34" charset="-122"/>
+                <a:cs typeface="Georgia" pitchFamily="34" charset="-120"/>
+              </a:rPr>
+              <a:t>Time-restricted eating</a:t>
+            </a:r>
+            <a:pPr algn="l" indent="0" marL="0">
+              <a:lnSpc>
+                <a:spcPts val="1620"/>
+              </a:lnSpc>
+              <a:spcAft>
+                <a:spcPts val="300"/>
+              </a:spcAft>
+              <a:buNone/>
+            </a:pPr>
+            <a:r>
+              <a:rPr lang="en-US" sz="1200" dirty="0">
+                <a:solidFill>
+                  <a:srgbClr val="1A1A1A"/>
+                </a:solidFill>
+                <a:latin typeface="Georgia" pitchFamily="34" charset="0"/>
+                <a:ea typeface="Georgia" pitchFamily="34" charset="-122"/>
+                <a:cs typeface="Georgia" pitchFamily="34" charset="-120"/>
+              </a:rPr>
+              <a:t> (aligned with dinacharya midday-meal principle) — Panda et al. — strong evidence for metabolic benefits · Strong</a:t>
+            </a:r>
+            <a:endParaRPr lang="en-US" sz="1200" dirty="0"/>
+          </a:p>
+          <a:p>
+            <a:pPr algn="l" marL="342900" indent="-342900">
+              <a:lnSpc>
+                <a:spcPts val="1620"/>
+              </a:lnSpc>
+              <a:spcAft>
+                <a:spcPts val="300"/>
+              </a:spcAft>
+              <a:buSzPct val="100000"/>
+              <a:buChar char="•"/>
+            </a:pPr>
+            <a:r>
+              <a:rPr lang="en-US" sz="1200" b="1" dirty="0">
+                <a:solidFill>
+                  <a:srgbClr val="1A1A1A"/>
+                </a:solidFill>
+                <a:latin typeface="Georgia" pitchFamily="34" charset="0"/>
+                <a:ea typeface="Georgia" pitchFamily="34" charset="-122"/>
+                <a:cs typeface="Georgia" pitchFamily="34" charset="-120"/>
+              </a:rPr>
+              <a:t>Yoga + breath for HRV</a:t>
+            </a:r>
+            <a:pPr algn="l" indent="0" marL="0">
+              <a:lnSpc>
+                <a:spcPts val="1620"/>
+              </a:lnSpc>
+              <a:spcAft>
+                <a:spcPts val="300"/>
+              </a:spcAft>
+              <a:buNone/>
+            </a:pPr>
+            <a:r>
+              <a:rPr lang="en-US" sz="1200" dirty="0">
+                <a:solidFill>
+                  <a:srgbClr val="1A1A1A"/>
+                </a:solidFill>
+                <a:latin typeface="Georgia" pitchFamily="34" charset="0"/>
+                <a:ea typeface="Georgia" pitchFamily="34" charset="-122"/>
+                <a:cs typeface="Georgia" pitchFamily="34" charset="-120"/>
+              </a:rPr>
+              <a:t> — Streeter (2010), multiple studies · Moderate</a:t>
+            </a:r>
+            <a:endParaRPr lang="en-US" sz="1200" dirty="0"/>
+          </a:p>
+          <a:p>
+            <a:pPr algn="l" marL="342900" indent="-342900">
+              <a:lnSpc>
+                <a:spcPts val="1620"/>
+              </a:lnSpc>
+              <a:spcAft>
+                <a:spcPts val="300"/>
+              </a:spcAft>
+              <a:buSzPct val="100000"/>
+              <a:buChar char="•"/>
+            </a:pPr>
+            <a:r>
+              <a:rPr lang="en-US" sz="1200" b="1" dirty="0">
+                <a:solidFill>
+                  <a:srgbClr val="1A1A1A"/>
+                </a:solidFill>
+                <a:latin typeface="Georgia" pitchFamily="34" charset="0"/>
+                <a:ea typeface="Georgia" pitchFamily="34" charset="-122"/>
+                <a:cs typeface="Georgia" pitchFamily="34" charset="-120"/>
+              </a:rPr>
+              <a:t>Tulsi (Ocimum sanctum) adaptogenic</a:t>
+            </a:r>
+            <a:pPr algn="l" indent="0" marL="0">
+              <a:lnSpc>
+                <a:spcPts val="1620"/>
+              </a:lnSpc>
+              <a:spcAft>
+                <a:spcPts val="300"/>
+              </a:spcAft>
+              <a:buNone/>
+            </a:pPr>
+            <a:r>
+              <a:rPr lang="en-US" sz="1200" dirty="0">
+                <a:solidFill>
+                  <a:srgbClr val="1A1A1A"/>
+                </a:solidFill>
+                <a:latin typeface="Georgia" pitchFamily="34" charset="0"/>
+                <a:ea typeface="Georgia" pitchFamily="34" charset="-122"/>
+                <a:cs typeface="Georgia" pitchFamily="34" charset="-120"/>
+              </a:rPr>
+              <a:t> — Modest RCT support for stress reduction · Modest</a:t>
+            </a:r>
+            <a:endParaRPr lang="en-US" sz="1200" dirty="0"/>
+          </a:p>
+          <a:p>
+            <a:pPr algn="l" marL="342900" indent="-342900">
+              <a:lnSpc>
+                <a:spcPts val="1620"/>
+              </a:lnSpc>
+              <a:spcAft>
+                <a:spcPts val="300"/>
+              </a:spcAft>
+              <a:buSzPct val="100000"/>
+              <a:buChar char="•"/>
+            </a:pPr>
+            <a:r>
+              <a:rPr lang="en-US" sz="1200" b="1" dirty="0">
+                <a:solidFill>
+                  <a:srgbClr val="1A1A1A"/>
+                </a:solidFill>
+                <a:latin typeface="Georgia" pitchFamily="34" charset="0"/>
+                <a:ea typeface="Georgia" pitchFamily="34" charset="-122"/>
+                <a:cs typeface="Georgia" pitchFamily="34" charset="-120"/>
+              </a:rPr>
+              <a:t>Triphala for digestive function</a:t>
+            </a:r>
+            <a:pPr algn="l" indent="0" marL="0">
+              <a:lnSpc>
+                <a:spcPts val="1620"/>
+              </a:lnSpc>
+              <a:spcAft>
+                <a:spcPts val="300"/>
+              </a:spcAft>
+              <a:buNone/>
+            </a:pPr>
+            <a:r>
+              <a:rPr lang="en-US" sz="1200" dirty="0">
+                <a:solidFill>
+                  <a:srgbClr val="1A1A1A"/>
+                </a:solidFill>
+                <a:latin typeface="Georgia" pitchFamily="34" charset="0"/>
+                <a:ea typeface="Georgia" pitchFamily="34" charset="-122"/>
+                <a:cs typeface="Georgia" pitchFamily="34" charset="-120"/>
+              </a:rPr>
+              <a:t> — Some clinical evidence · Modest</a:t>
+            </a:r>
+            <a:endParaRPr lang="en-US" sz="1200" dirty="0"/>
+          </a:p>
+          <a:p>
+            <a:pPr algn="l" marL="342900" indent="-342900">
+              <a:lnSpc>
+                <a:spcPts val="1620"/>
+              </a:lnSpc>
+              <a:spcAft>
+                <a:spcPts val="300"/>
+              </a:spcAft>
+              <a:buSzPct val="100000"/>
+              <a:buChar char="•"/>
+            </a:pPr>
+            <a:r>
+              <a:rPr lang="en-US" sz="1200" b="1" dirty="0">
+                <a:solidFill>
+                  <a:srgbClr val="1A1A1A"/>
+                </a:solidFill>
+                <a:latin typeface="Georgia" pitchFamily="34" charset="0"/>
+                <a:ea typeface="Georgia" pitchFamily="34" charset="-122"/>
+                <a:cs typeface="Georgia" pitchFamily="34" charset="-120"/>
+              </a:rPr>
+              <a:t>Pulse diagnosis (nāḍī parīkṣā)</a:t>
+            </a:r>
+            <a:pPr algn="l" indent="0" marL="0">
+              <a:lnSpc>
+                <a:spcPts val="1620"/>
+              </a:lnSpc>
+              <a:spcAft>
+                <a:spcPts val="300"/>
+              </a:spcAft>
+              <a:buNone/>
+            </a:pPr>
+            <a:r>
+              <a:rPr lang="en-US" sz="1200" dirty="0">
+                <a:solidFill>
+                  <a:srgbClr val="1A1A1A"/>
+                </a:solidFill>
+                <a:latin typeface="Georgia" pitchFamily="34" charset="0"/>
+                <a:ea typeface="Georgia" pitchFamily="34" charset="-122"/>
+                <a:cs typeface="Georgia" pitchFamily="34" charset="-120"/>
+              </a:rPr>
+              <a:t> — Inter-rater agreement studies — mixed · Weak</a:t>
             </a:r>
             <a:endParaRPr lang="en-US" sz="1200" dirty="0"/>
           </a:p>
@@ -4459,7 +5857,7 @@
                 <a:ea typeface="Times New Roman" pitchFamily="34" charset="-122"/>
                 <a:cs typeface="Times New Roman" pitchFamily="34" charset="-120"/>
               </a:rPr>
-              <a:t>Differentiation</a:t>
+              <a:t>Core (25 min) (cont.)</a:t>
             </a:r>
             <a:endParaRPr lang="en-US" sz="1800" dirty="0"/>
           </a:p>
@@ -4505,7 +5903,7 @@
                 <a:ea typeface="Georgia" pitchFamily="34" charset="-122"/>
                 <a:cs typeface="Georgia" pitchFamily="34" charset="-120"/>
               </a:rPr>
-              <a:t>Tier up:</a:t>
+              <a:t>Specific dosha-based dietary prescriptions</a:t>
             </a:r>
             <a:pPr algn="l" indent="0" marL="0">
               <a:lnSpc>
@@ -4525,7 +5923,7 @@
                 <a:ea typeface="Georgia" pitchFamily="34" charset="-122"/>
                 <a:cs typeface="Georgia" pitchFamily="34" charset="-120"/>
               </a:rPr>
-              <a:t> Read a full RCT — find one via Google Scholar on a specific Ayurvedic intervention. Critique.</a:t>
+              <a:t> — Mixed; many specific claims fail RCT · Weak</a:t>
             </a:r>
             <a:endParaRPr lang="en-US" sz="1200" dirty="0"/>
           </a:p>
@@ -4549,7 +5947,7 @@
                 <a:ea typeface="Georgia" pitchFamily="34" charset="-122"/>
                 <a:cs typeface="Georgia" pitchFamily="34" charset="-120"/>
               </a:rPr>
-              <a:t>Tier down:</a:t>
+              <a:t>Pancha-karma cleansing protocols</a:t>
             </a:r>
             <a:pPr algn="l" indent="0" marL="0">
               <a:lnSpc>
@@ -4569,7 +5967,7 @@
                 <a:ea typeface="Georgia" pitchFamily="34" charset="-122"/>
                 <a:cs typeface="Georgia" pitchFamily="34" charset="-120"/>
               </a:rPr>
-              <a:t> Memorise the evidence-strength table.</a:t>
+              <a:t> — Limited; mostly observational · Weak</a:t>
             </a:r>
             <a:endParaRPr lang="en-US" sz="1200" dirty="0"/>
           </a:p>
@@ -4727,7 +6125,7 @@
                 <a:ea typeface="Times New Roman" pitchFamily="34" charset="-122"/>
                 <a:cs typeface="Times New Roman" pitchFamily="34" charset="-120"/>
               </a:rPr>
-              <a:t>Teacher notes</a:t>
+              <a:t>Core (25 min) (cont.)</a:t>
             </a:r>
             <a:endParaRPr lang="en-US" sz="1800" dirty="0"/>
           </a:p>
@@ -4741,8 +6139,8 @@
         </p:nvSpPr>
         <p:spPr>
           <a:xfrm>
-            <a:off x="406301" y="870942"/>
-            <a:ext cx="8498026" cy="639812"/>
+            <a:off x="634901" y="883593"/>
+            <a:ext cx="8102798" cy="281880"/>
           </a:xfrm>
           <a:prstGeom prst="rect">
             <a:avLst/>
@@ -4754,13 +6152,31 @@
           <a:bodyPr wrap="square" lIns="0" tIns="0" rIns="0" bIns="0" rtlCol="0" anchor="t"/>
           <a:lstStyle/>
           <a:p>
+            <a:pPr algn="l" marL="342900" indent="-342900">
+              <a:lnSpc>
+                <a:spcPts val="1620"/>
+              </a:lnSpc>
+              <a:spcAft>
+                <a:spcPts val="300"/>
+              </a:spcAft>
+              <a:buSzPct val="100000"/>
+              <a:buChar char="•"/>
+            </a:pPr>
+            <a:r>
+              <a:rPr lang="en-US" sz="1200" b="1" dirty="0">
+                <a:solidFill>
+                  <a:srgbClr val="1A1A1A"/>
+                </a:solidFill>
+                <a:latin typeface="Georgia" pitchFamily="34" charset="0"/>
+                <a:ea typeface="Georgia" pitchFamily="34" charset="-122"/>
+                <a:cs typeface="Georgia" pitchFamily="34" charset="-120"/>
+              </a:rPr>
+              <a:t>The pattern.</a:t>
+            </a:r>
             <a:pPr algn="l" indent="0" marL="0">
               <a:lnSpc>
-                <a:spcPts val="1680"/>
-              </a:lnSpc>
-              <a:spcBef>
-                <a:spcPts val="300"/>
-              </a:spcBef>
+                <a:spcPts val="1620"/>
+              </a:lnSpc>
               <a:spcAft>
                 <a:spcPts val="300"/>
               </a:spcAft>
@@ -4775,7 +6191,7 @@
                 <a:ea typeface="Georgia" pitchFamily="34" charset="-122"/>
                 <a:cs typeface="Georgia" pitchFamily="34" charset="-120"/>
               </a:rPr>
-              <a:t>– The "evidence map" is the most important takeaway. Distinguish well-evidenced from weakly-evidenced. Don't lump. – Some students will resist the "weak evidence" verdict on parts they personally value. Validate the value; hold the evidence standard.</a:t>
+              <a:t> Things that survive evidence scrutiny:</a:t>
             </a:r>
             <a:endParaRPr lang="en-US" sz="1200" dirty="0"/>
           </a:p>
@@ -4784,6 +6200,100 @@
       <p:sp>
         <p:nvSpPr>
           <p:cNvPr id="5" name="Text 3"/>
+          <p:cNvSpPr/>
+          <p:nvPr/>
+        </p:nvSpPr>
+        <p:spPr>
+          <a:xfrm>
+            <a:off x="634901" y="1266974"/>
+            <a:ext cx="8102798" cy="769441"/>
+          </a:xfrm>
+          <a:prstGeom prst="rect">
+            <a:avLst/>
+          </a:prstGeom>
+          <a:noFill/>
+          <a:ln/>
+        </p:spPr>
+        <p:txBody>
+          <a:bodyPr wrap="square" lIns="0" tIns="0" rIns="0" bIns="0" rtlCol="0" anchor="t"/>
+          <a:lstStyle/>
+          <a:p>
+            <a:pPr algn="l" marL="342900" indent="-342900">
+              <a:lnSpc>
+                <a:spcPts val="1620"/>
+              </a:lnSpc>
+              <a:spcAft>
+                <a:spcPts val="300"/>
+              </a:spcAft>
+              <a:buSzPct val="100000"/>
+              <a:buChar char="•"/>
+            </a:pPr>
+            <a:r>
+              <a:rPr lang="en-US" sz="1200" dirty="0">
+                <a:solidFill>
+                  <a:srgbClr val="1A1A1A"/>
+                </a:solidFill>
+                <a:latin typeface="Georgia" pitchFamily="34" charset="0"/>
+                <a:ea typeface="Georgia" pitchFamily="34" charset="-122"/>
+                <a:cs typeface="Georgia" pitchFamily="34" charset="-120"/>
+              </a:rPr>
+              <a:t>Single-compound herbs with measurable biochemical effects (turmeric, ashwagandha, tulsi).</a:t>
+            </a:r>
+            <a:endParaRPr lang="en-US" sz="1200" dirty="0"/>
+          </a:p>
+          <a:p>
+            <a:pPr algn="l" marL="342900" indent="-342900">
+              <a:lnSpc>
+                <a:spcPts val="1620"/>
+              </a:lnSpc>
+              <a:spcAft>
+                <a:spcPts val="300"/>
+              </a:spcAft>
+              <a:buSzPct val="100000"/>
+              <a:buChar char="•"/>
+            </a:pPr>
+            <a:r>
+              <a:rPr lang="en-US" sz="1200" dirty="0">
+                <a:solidFill>
+                  <a:srgbClr val="1A1A1A"/>
+                </a:solidFill>
+                <a:latin typeface="Georgia" pitchFamily="34" charset="0"/>
+                <a:ea typeface="Georgia" pitchFamily="34" charset="-122"/>
+                <a:cs typeface="Georgia" pitchFamily="34" charset="-120"/>
+              </a:rPr>
+              <a:t>Lifestyle / behavioral interventions aligned with modern lifestyle medicine (regular sleep, meal timing, exercise).</a:t>
+            </a:r>
+            <a:endParaRPr lang="en-US" sz="1200" dirty="0"/>
+          </a:p>
+          <a:p>
+            <a:pPr algn="l" marL="342900" indent="-342900">
+              <a:lnSpc>
+                <a:spcPts val="1620"/>
+              </a:lnSpc>
+              <a:spcAft>
+                <a:spcPts val="300"/>
+              </a:spcAft>
+              <a:buSzPct val="100000"/>
+              <a:buChar char="•"/>
+            </a:pPr>
+            <a:r>
+              <a:rPr lang="en-US" sz="1200" dirty="0">
+                <a:solidFill>
+                  <a:srgbClr val="1A1A1A"/>
+                </a:solidFill>
+                <a:latin typeface="Georgia" pitchFamily="34" charset="0"/>
+                <a:ea typeface="Georgia" pitchFamily="34" charset="-122"/>
+                <a:cs typeface="Georgia" pitchFamily="34" charset="-120"/>
+              </a:rPr>
+              <a:t>General yoga and breath interventions.</a:t>
+            </a:r>
+            <a:endParaRPr lang="en-US" sz="1200" dirty="0"/>
+          </a:p>
+        </p:txBody>
+      </p:sp>
+      <p:sp>
+        <p:nvSpPr>
+          <p:cNvPr id="6" name="Text 4"/>
           <p:cNvSpPr/>
           <p:nvPr/>
         </p:nvSpPr>
